--- a/public/lessons/year-6-maths/spring/week-14/use-equivalent-fractions-when-dividing/teaching-powerpoint-v1.pptx
+++ b/public/lessons/year-6-maths/spring/week-14/use-equivalent-fractions-when-dividing/teaching-powerpoint-v1.pptx
@@ -2,24 +2,24 @@
 <file path=ppt/presentation.xml><?xml version="1.0" encoding="utf-8"?>
 <p:presentation xmlns:p="http://schemas.openxmlformats.org/presentationml/2006/main">
   <p:sldMasterIdLst>
-    <p:sldMasterId xmlns:r="http://schemas.openxmlformats.org/officeDocument/2006/relationships" id="2147483648" r:id="R26dfe5f28c2f496a"/>
+    <p:sldMasterId xmlns:r="http://schemas.openxmlformats.org/officeDocument/2006/relationships" id="2147483648" r:id="R26006388fc964c5b"/>
   </p:sldMasterIdLst>
   <p:notesMasterIdLst>
-    <p:notesMasterId xmlns:r="http://schemas.openxmlformats.org/officeDocument/2006/relationships" r:id="R1d58badb27084719"/>
+    <p:notesMasterId xmlns:r="http://schemas.openxmlformats.org/officeDocument/2006/relationships" r:id="Rb7d403132cec464f"/>
   </p:notesMasterIdLst>
   <p:sldIdLst>
-    <p:sldId xmlns:r="http://schemas.openxmlformats.org/officeDocument/2006/relationships" id="256" r:id="Rfe65d6b23a224c32"/>
-    <p:sldId xmlns:r="http://schemas.openxmlformats.org/officeDocument/2006/relationships" id="257" r:id="R2663bed6a4204240"/>
-    <p:sldId xmlns:r="http://schemas.openxmlformats.org/officeDocument/2006/relationships" id="258" r:id="Rb3dd2341af0c465b"/>
-    <p:sldId xmlns:r="http://schemas.openxmlformats.org/officeDocument/2006/relationships" id="259" r:id="Rd97bfdf3f67a4cf1"/>
-    <p:sldId xmlns:r="http://schemas.openxmlformats.org/officeDocument/2006/relationships" id="260" r:id="Rc524c8762d2d4e74"/>
-    <p:sldId xmlns:r="http://schemas.openxmlformats.org/officeDocument/2006/relationships" id="261" r:id="R824e5e548b9b4922"/>
-    <p:sldId xmlns:r="http://schemas.openxmlformats.org/officeDocument/2006/relationships" id="262" r:id="R88e4d0ffd8414d89"/>
-    <p:sldId xmlns:r="http://schemas.openxmlformats.org/officeDocument/2006/relationships" id="263" r:id="Rb9aa3a5d4836408a"/>
-    <p:sldId xmlns:r="http://schemas.openxmlformats.org/officeDocument/2006/relationships" id="264" r:id="Ra104fd32336e453a"/>
-    <p:sldId xmlns:r="http://schemas.openxmlformats.org/officeDocument/2006/relationships" id="265" r:id="R4bc319ccb38b432a"/>
-    <p:sldId xmlns:r="http://schemas.openxmlformats.org/officeDocument/2006/relationships" id="266" r:id="Rc1bb7cf793204a5b"/>
-    <p:sldId xmlns:r="http://schemas.openxmlformats.org/officeDocument/2006/relationships" id="267" r:id="R0e57855439364aed"/>
+    <p:sldId xmlns:r="http://schemas.openxmlformats.org/officeDocument/2006/relationships" id="256" r:id="R839ffb19c7954df8"/>
+    <p:sldId xmlns:r="http://schemas.openxmlformats.org/officeDocument/2006/relationships" id="257" r:id="R6c24bd91d645479f"/>
+    <p:sldId xmlns:r="http://schemas.openxmlformats.org/officeDocument/2006/relationships" id="258" r:id="R6c5241600adf40a3"/>
+    <p:sldId xmlns:r="http://schemas.openxmlformats.org/officeDocument/2006/relationships" id="259" r:id="R8cb94cafd5e04032"/>
+    <p:sldId xmlns:r="http://schemas.openxmlformats.org/officeDocument/2006/relationships" id="260" r:id="R84030a86c9734035"/>
+    <p:sldId xmlns:r="http://schemas.openxmlformats.org/officeDocument/2006/relationships" id="261" r:id="R2363b0bf75be4766"/>
+    <p:sldId xmlns:r="http://schemas.openxmlformats.org/officeDocument/2006/relationships" id="262" r:id="R0e690084182f4429"/>
+    <p:sldId xmlns:r="http://schemas.openxmlformats.org/officeDocument/2006/relationships" id="263" r:id="Rf5534e36d6f84f14"/>
+    <p:sldId xmlns:r="http://schemas.openxmlformats.org/officeDocument/2006/relationships" id="264" r:id="R3ea29d3b4e604198"/>
+    <p:sldId xmlns:r="http://schemas.openxmlformats.org/officeDocument/2006/relationships" id="265" r:id="Red5e1d0cb2e34177"/>
+    <p:sldId xmlns:r="http://schemas.openxmlformats.org/officeDocument/2006/relationships" id="266" r:id="R96254ce217e84a05"/>
+    <p:sldId xmlns:r="http://schemas.openxmlformats.org/officeDocument/2006/relationships" id="267" r:id="Re7bc6ab5a9ce4dca"/>
   </p:sldIdLst>
   <p:sldSz cx="12192000" cy="6858000"/>
   <p:notesSz cx="6858000" cy="9144000"/>
@@ -873,7 +873,7 @@
           <a:lstStyle xmlns:a="http://schemas.openxmlformats.org/drawingml/2006/main"/>
           <a:p xmlns:a="http://schemas.openxmlformats.org/drawingml/2006/main">
             <a:r>
-              <a:t>I do. Reveal the question, setup and each calculation stage one click at a time. Pupils watch before copying. Model answer: 5/18.</a:t>
+              <a:t>I do. Reveal the question, then reveal each mathematical change one click at a time. Point to the numbers and operation that changed before moving to the next line. Final answer: 5/18.</a:t>
             </a:r>
           </a:p>
         </p:txBody>
@@ -1291,7 +1291,7 @@
   </p:cSld>
   <p:clrMap bg1="lt1" tx1="dk1" bg2="lt2" tx2="dk2" accent1="accent1" accent2="accent2" accent3="accent3" accent4="accent4" accent5="accent5" accent6="accent6" hlink="hlink" folHlink="folHlink"/>
   <p:sldLayoutIdLst>
-    <p:sldLayoutId xmlns:r="http://schemas.openxmlformats.org/officeDocument/2006/relationships" id="2147483649" r:id="Ra45d329502df465b"/>
+    <p:sldLayoutId xmlns:r="http://schemas.openxmlformats.org/officeDocument/2006/relationships" id="2147483649" r:id="R69def06155994243"/>
   </p:sldLayoutIdLst>
   <p:txStyles>
     <p:titleStyle>
@@ -1842,7 +1842,7 @@
           <p:cNvPr id="12" name="">
             <a:extLst xmlns:a="http://schemas.openxmlformats.org/drawingml/2006/main">
               <a:ext uri="{FF2B5EF4-FFF2-40B4-BE49-F238E27FC236}">
-                <a16:creationId xmlns:a16="http://schemas.microsoft.com/office/drawing/2014/main" id="{F78C8BFE-FBD2-474D-80AE-02D0E9E5918D}"/>
+                <a16:creationId xmlns:a16="http://schemas.microsoft.com/office/drawing/2014/main" id="{5A7AC393-83E6-4DE5-A1D2-691CE93F7C6B}"/>
               </a:ext>
             </a:extLst>
           </p:cNvPr>
@@ -1874,7 +1874,7 @@
           <p:cNvPr id="2" name="">
             <a:extLst xmlns:a="http://schemas.openxmlformats.org/drawingml/2006/main">
               <a:ext uri="{FF2B5EF4-FFF2-40B4-BE49-F238E27FC236}">
-                <a16:creationId xmlns:a16="http://schemas.microsoft.com/office/drawing/2014/main" id="{EFACDDC1-EFF9-431C-9CA6-F214A52536AA}"/>
+                <a16:creationId xmlns:a16="http://schemas.microsoft.com/office/drawing/2014/main" id="{853DB296-9CDB-401D-916B-E9386976A10B}"/>
               </a:ext>
             </a:extLst>
           </p:cNvPr>
@@ -1931,7 +1931,7 @@
           <p:cNvPr id="3" name="">
             <a:extLst xmlns:a="http://schemas.openxmlformats.org/drawingml/2006/main">
               <a:ext uri="{FF2B5EF4-FFF2-40B4-BE49-F238E27FC236}">
-                <a16:creationId xmlns:a16="http://schemas.microsoft.com/office/drawing/2014/main" id="{58A56BB7-DFD4-4E78-B17E-4F9003DCE4AB}"/>
+                <a16:creationId xmlns:a16="http://schemas.microsoft.com/office/drawing/2014/main" id="{3834E10F-35FA-4EBE-B61E-10A09A30F388}"/>
               </a:ext>
             </a:extLst>
           </p:cNvPr>
@@ -1965,7 +1965,7 @@
           <p:cNvPr id="4" name="">
             <a:extLst xmlns:a="http://schemas.openxmlformats.org/drawingml/2006/main">
               <a:ext uri="{FF2B5EF4-FFF2-40B4-BE49-F238E27FC236}">
-                <a16:creationId xmlns:a16="http://schemas.microsoft.com/office/drawing/2014/main" id="{79C9FF22-E39E-4EB8-B5A5-06A6D8380514}"/>
+                <a16:creationId xmlns:a16="http://schemas.microsoft.com/office/drawing/2014/main" id="{2FAAF2CF-4FFF-450C-BB20-2B6DBC3B4DBA}"/>
               </a:ext>
             </a:extLst>
           </p:cNvPr>
@@ -2022,7 +2022,7 @@
           <p:cNvPr id="5" name="">
             <a:extLst xmlns:a="http://schemas.openxmlformats.org/drawingml/2006/main">
               <a:ext uri="{FF2B5EF4-FFF2-40B4-BE49-F238E27FC236}">
-                <a16:creationId xmlns:a16="http://schemas.microsoft.com/office/drawing/2014/main" id="{322735A9-F594-41DB-BE98-CD089BB16AC4}"/>
+                <a16:creationId xmlns:a16="http://schemas.microsoft.com/office/drawing/2014/main" id="{A54976C1-CE37-49E7-A923-859C3128FFA9}"/>
               </a:ext>
             </a:extLst>
           </p:cNvPr>
@@ -2079,7 +2079,7 @@
           <p:cNvPr id="6" name="">
             <a:extLst xmlns:a="http://schemas.openxmlformats.org/drawingml/2006/main">
               <a:ext uri="{FF2B5EF4-FFF2-40B4-BE49-F238E27FC236}">
-                <a16:creationId xmlns:a16="http://schemas.microsoft.com/office/drawing/2014/main" id="{9A838638-CCE7-420F-BE72-E19BF99C9A4E}"/>
+                <a16:creationId xmlns:a16="http://schemas.microsoft.com/office/drawing/2014/main" id="{37CEF750-F296-448A-81DF-5C7B3A480EE0}"/>
               </a:ext>
             </a:extLst>
           </p:cNvPr>
@@ -2113,7 +2113,7 @@
           <p:cNvPr id="7" name="">
             <a:extLst xmlns:a="http://schemas.openxmlformats.org/drawingml/2006/main">
               <a:ext uri="{FF2B5EF4-FFF2-40B4-BE49-F238E27FC236}">
-                <a16:creationId xmlns:a16="http://schemas.microsoft.com/office/drawing/2014/main" id="{4C75CE42-0310-4BFF-8E9B-C29C45F388C4}"/>
+                <a16:creationId xmlns:a16="http://schemas.microsoft.com/office/drawing/2014/main" id="{1F16830A-B63A-4C1A-B66B-1004D7E939D7}"/>
               </a:ext>
             </a:extLst>
           </p:cNvPr>
@@ -2170,7 +2170,7 @@
           <p:cNvPr id="8" name="">
             <a:extLst xmlns:a="http://schemas.openxmlformats.org/drawingml/2006/main">
               <a:ext uri="{FF2B5EF4-FFF2-40B4-BE49-F238E27FC236}">
-                <a16:creationId xmlns:a16="http://schemas.microsoft.com/office/drawing/2014/main" id="{B80C8A50-570E-4613-8488-6E9502DEB6C0}"/>
+                <a16:creationId xmlns:a16="http://schemas.microsoft.com/office/drawing/2014/main" id="{08C85D71-F626-4BB1-9852-DDABB74B1312}"/>
               </a:ext>
             </a:extLst>
           </p:cNvPr>
@@ -2227,7 +2227,7 @@
           <p:cNvPr id="9" name="">
             <a:extLst xmlns:a="http://schemas.openxmlformats.org/drawingml/2006/main">
               <a:ext uri="{FF2B5EF4-FFF2-40B4-BE49-F238E27FC236}">
-                <a16:creationId xmlns:a16="http://schemas.microsoft.com/office/drawing/2014/main" id="{5389144F-80E3-4641-9798-261BB304AB55}"/>
+                <a16:creationId xmlns:a16="http://schemas.microsoft.com/office/drawing/2014/main" id="{2BD78027-6871-46D3-BCF7-4ECE5EB0DBEE}"/>
               </a:ext>
             </a:extLst>
           </p:cNvPr>
@@ -2284,7 +2284,7 @@
           <p:cNvPr id="10" name="">
             <a:extLst xmlns:a="http://schemas.openxmlformats.org/drawingml/2006/main">
               <a:ext uri="{FF2B5EF4-FFF2-40B4-BE49-F238E27FC236}">
-                <a16:creationId xmlns:a16="http://schemas.microsoft.com/office/drawing/2014/main" id="{8367A026-0827-4E20-8F12-9C0957ACD73F}"/>
+                <a16:creationId xmlns:a16="http://schemas.microsoft.com/office/drawing/2014/main" id="{CC21108F-F0B2-407E-B281-B572813D4C67}"/>
               </a:ext>
             </a:extLst>
           </p:cNvPr>
@@ -2341,7 +2341,7 @@
           <p:cNvPr id="11" name="">
             <a:extLst xmlns:a="http://schemas.openxmlformats.org/drawingml/2006/main">
               <a:ext uri="{FF2B5EF4-FFF2-40B4-BE49-F238E27FC236}">
-                <a16:creationId xmlns:a16="http://schemas.microsoft.com/office/drawing/2014/main" id="{1C08CCBA-053F-4ACC-9FAC-CD54DD0112E1}"/>
+                <a16:creationId xmlns:a16="http://schemas.microsoft.com/office/drawing/2014/main" id="{A5DAFA9C-3B93-4D61-A3A8-F31B69B7B106}"/>
               </a:ext>
             </a:extLst>
           </p:cNvPr>
@@ -2396,7 +2396,7 @@
     </p:spTree>
     <p:extLst>
       <p:ext uri="{BB962C8B-B14F-4D97-AF65-F5344CB8AC3E}">
-        <p14:creationId xmlns:p14="http://schemas.microsoft.com/office/powerpoint/2010/main" val="1310044335"/>
+        <p14:creationId xmlns:p14="http://schemas.microsoft.com/office/powerpoint/2010/main" val="998655903"/>
       </p:ext>
     </p:extLst>
   </p:cSld>
@@ -2427,7 +2427,7 @@
           <p:cNvPr id="14" name="">
             <a:extLst xmlns:a="http://schemas.openxmlformats.org/drawingml/2006/main">
               <a:ext uri="{FF2B5EF4-FFF2-40B4-BE49-F238E27FC236}">
-                <a16:creationId xmlns:a16="http://schemas.microsoft.com/office/drawing/2014/main" id="{5603ACB4-95D1-4810-9E3C-2BB73CA5843F}"/>
+                <a16:creationId xmlns:a16="http://schemas.microsoft.com/office/drawing/2014/main" id="{C69D4826-A446-4531-8DD8-71AF9F61B260}"/>
               </a:ext>
             </a:extLst>
           </p:cNvPr>
@@ -2459,7 +2459,7 @@
           <p:cNvPr id="2" name="">
             <a:extLst xmlns:a="http://schemas.openxmlformats.org/drawingml/2006/main">
               <a:ext uri="{FF2B5EF4-FFF2-40B4-BE49-F238E27FC236}">
-                <a16:creationId xmlns:a16="http://schemas.microsoft.com/office/drawing/2014/main" id="{2B806461-BBF7-4927-9B09-32092460102F}"/>
+                <a16:creationId xmlns:a16="http://schemas.microsoft.com/office/drawing/2014/main" id="{BA38FFD0-3448-40DB-AA29-0F07F1F1CBD0}"/>
               </a:ext>
             </a:extLst>
           </p:cNvPr>
@@ -2516,7 +2516,7 @@
           <p:cNvPr id="3" name="">
             <a:extLst xmlns:a="http://schemas.openxmlformats.org/drawingml/2006/main">
               <a:ext uri="{FF2B5EF4-FFF2-40B4-BE49-F238E27FC236}">
-                <a16:creationId xmlns:a16="http://schemas.microsoft.com/office/drawing/2014/main" id="{9B67914E-9EB8-4C4D-8E7C-A78F9B4358D8}"/>
+                <a16:creationId xmlns:a16="http://schemas.microsoft.com/office/drawing/2014/main" id="{1695D3CC-8E92-4CD8-96C6-CB05BD3E8B36}"/>
               </a:ext>
             </a:extLst>
           </p:cNvPr>
@@ -2548,7 +2548,7 @@
           <p:cNvPr id="4" name="">
             <a:extLst xmlns:a="http://schemas.openxmlformats.org/drawingml/2006/main">
               <a:ext uri="{FF2B5EF4-FFF2-40B4-BE49-F238E27FC236}">
-                <a16:creationId xmlns:a16="http://schemas.microsoft.com/office/drawing/2014/main" id="{6BDB1C55-7FBF-42A4-88DE-363D1C18F312}"/>
+                <a16:creationId xmlns:a16="http://schemas.microsoft.com/office/drawing/2014/main" id="{9E6A8B87-77B7-4471-83C8-9537FEF7B8E8}"/>
               </a:ext>
             </a:extLst>
           </p:cNvPr>
@@ -2605,7 +2605,7 @@
           <p:cNvPr id="5" name="">
             <a:extLst xmlns:a="http://schemas.openxmlformats.org/drawingml/2006/main">
               <a:ext uri="{FF2B5EF4-FFF2-40B4-BE49-F238E27FC236}">
-                <a16:creationId xmlns:a16="http://schemas.microsoft.com/office/drawing/2014/main" id="{E23EC894-79C5-483E-A895-D046D35AFD1C}"/>
+                <a16:creationId xmlns:a16="http://schemas.microsoft.com/office/drawing/2014/main" id="{BD69F40E-21A0-4ABE-9A4F-ED7458192C9C}"/>
               </a:ext>
             </a:extLst>
           </p:cNvPr>
@@ -2662,7 +2662,7 @@
           <p:cNvPr id="6" name="">
             <a:extLst xmlns:a="http://schemas.openxmlformats.org/drawingml/2006/main">
               <a:ext uri="{FF2B5EF4-FFF2-40B4-BE49-F238E27FC236}">
-                <a16:creationId xmlns:a16="http://schemas.microsoft.com/office/drawing/2014/main" id="{7285BF7A-0BB8-47FB-B714-43A15FCCA23D}"/>
+                <a16:creationId xmlns:a16="http://schemas.microsoft.com/office/drawing/2014/main" id="{C09377DA-8BF8-41D1-AA3C-FE8886F7C81E}"/>
               </a:ext>
             </a:extLst>
           </p:cNvPr>
@@ -2719,7 +2719,7 @@
           <p:cNvPr id="7" name="">
             <a:extLst xmlns:a="http://schemas.openxmlformats.org/drawingml/2006/main">
               <a:ext uri="{FF2B5EF4-FFF2-40B4-BE49-F238E27FC236}">
-                <a16:creationId xmlns:a16="http://schemas.microsoft.com/office/drawing/2014/main" id="{29139F89-9696-43AA-BDCF-1543ACFD6350}"/>
+                <a16:creationId xmlns:a16="http://schemas.microsoft.com/office/drawing/2014/main" id="{F79B3D76-A602-48DE-B104-090371AD656A}"/>
               </a:ext>
             </a:extLst>
           </p:cNvPr>
@@ -2751,7 +2751,7 @@
           <p:cNvPr id="8" name="">
             <a:extLst xmlns:a="http://schemas.openxmlformats.org/drawingml/2006/main">
               <a:ext uri="{FF2B5EF4-FFF2-40B4-BE49-F238E27FC236}">
-                <a16:creationId xmlns:a16="http://schemas.microsoft.com/office/drawing/2014/main" id="{6468A8C7-FEC2-4DCB-AAF0-8E93394E0728}"/>
+                <a16:creationId xmlns:a16="http://schemas.microsoft.com/office/drawing/2014/main" id="{05313A2B-DA46-4CA5-BBED-8D89575BC74A}"/>
               </a:ext>
             </a:extLst>
           </p:cNvPr>
@@ -2808,7 +2808,7 @@
           <p:cNvPr id="9" name="">
             <a:extLst xmlns:a="http://schemas.openxmlformats.org/drawingml/2006/main">
               <a:ext uri="{FF2B5EF4-FFF2-40B4-BE49-F238E27FC236}">
-                <a16:creationId xmlns:a16="http://schemas.microsoft.com/office/drawing/2014/main" id="{C278B3D5-7DE3-4311-8D35-193C9992E84A}"/>
+                <a16:creationId xmlns:a16="http://schemas.microsoft.com/office/drawing/2014/main" id="{D01B7089-2812-43FC-98A9-5B80C82EBDCB}"/>
               </a:ext>
             </a:extLst>
           </p:cNvPr>
@@ -2865,7 +2865,7 @@
           <p:cNvPr id="10" name="">
             <a:extLst xmlns:a="http://schemas.openxmlformats.org/drawingml/2006/main">
               <a:ext uri="{FF2B5EF4-FFF2-40B4-BE49-F238E27FC236}">
-                <a16:creationId xmlns:a16="http://schemas.microsoft.com/office/drawing/2014/main" id="{3A500009-2CD9-4DF2-BD82-9B435ED6FC62}"/>
+                <a16:creationId xmlns:a16="http://schemas.microsoft.com/office/drawing/2014/main" id="{11322E5C-A8A9-4A16-A284-85705E0B9216}"/>
               </a:ext>
             </a:extLst>
           </p:cNvPr>
@@ -2922,7 +2922,7 @@
           <p:cNvPr id="11" name="">
             <a:extLst xmlns:a="http://schemas.openxmlformats.org/drawingml/2006/main">
               <a:ext uri="{FF2B5EF4-FFF2-40B4-BE49-F238E27FC236}">
-                <a16:creationId xmlns:a16="http://schemas.microsoft.com/office/drawing/2014/main" id="{DA2443B3-6A39-4F6E-9CFB-DE2D8F987504}"/>
+                <a16:creationId xmlns:a16="http://schemas.microsoft.com/office/drawing/2014/main" id="{8D509B5A-014A-47D1-8C07-F8BC2087BFCE}"/>
               </a:ext>
             </a:extLst>
           </p:cNvPr>
@@ -2979,7 +2979,7 @@
           <p:cNvPr id="12" name="">
             <a:extLst xmlns:a="http://schemas.openxmlformats.org/drawingml/2006/main">
               <a:ext uri="{FF2B5EF4-FFF2-40B4-BE49-F238E27FC236}">
-                <a16:creationId xmlns:a16="http://schemas.microsoft.com/office/drawing/2014/main" id="{48F5178C-54AD-44EC-8623-86635594354D}"/>
+                <a16:creationId xmlns:a16="http://schemas.microsoft.com/office/drawing/2014/main" id="{590BD1C9-F141-462B-B046-3DCF1B5D0E36}"/>
               </a:ext>
             </a:extLst>
           </p:cNvPr>
@@ -3036,7 +3036,7 @@
           <p:cNvPr id="13" name="">
             <a:extLst xmlns:a="http://schemas.openxmlformats.org/drawingml/2006/main">
               <a:ext uri="{FF2B5EF4-FFF2-40B4-BE49-F238E27FC236}">
-                <a16:creationId xmlns:a16="http://schemas.microsoft.com/office/drawing/2014/main" id="{88CB1881-E2DE-4191-A3FD-8754471CC3EF}"/>
+                <a16:creationId xmlns:a16="http://schemas.microsoft.com/office/drawing/2014/main" id="{7EE99AFF-4337-47C2-B7B0-9FE3EA896A81}"/>
               </a:ext>
             </a:extLst>
           </p:cNvPr>
@@ -3091,7 +3091,7 @@
     </p:spTree>
     <p:extLst>
       <p:ext uri="{BB962C8B-B14F-4D97-AF65-F5344CB8AC3E}">
-        <p14:creationId xmlns:p14="http://schemas.microsoft.com/office/powerpoint/2010/main" val="4445166"/>
+        <p14:creationId xmlns:p14="http://schemas.microsoft.com/office/powerpoint/2010/main" val="1962053444"/>
       </p:ext>
     </p:extLst>
   </p:cSld>
@@ -3292,7 +3292,7 @@
           <p:cNvPr id="19" name="">
             <a:extLst xmlns:a="http://schemas.openxmlformats.org/drawingml/2006/main">
               <a:ext uri="{FF2B5EF4-FFF2-40B4-BE49-F238E27FC236}">
-                <a16:creationId xmlns:a16="http://schemas.microsoft.com/office/drawing/2014/main" id="{F8A2BBEF-496E-4FD9-938F-4D5789B7D3B3}"/>
+                <a16:creationId xmlns:a16="http://schemas.microsoft.com/office/drawing/2014/main" id="{34920C9F-AD22-42D5-81D5-D28537F11E74}"/>
               </a:ext>
             </a:extLst>
           </p:cNvPr>
@@ -3324,7 +3324,7 @@
           <p:cNvPr id="2" name="">
             <a:extLst xmlns:a="http://schemas.openxmlformats.org/drawingml/2006/main">
               <a:ext uri="{FF2B5EF4-FFF2-40B4-BE49-F238E27FC236}">
-                <a16:creationId xmlns:a16="http://schemas.microsoft.com/office/drawing/2014/main" id="{4AC5DF93-8C74-465D-859A-0EFBF1925F85}"/>
+                <a16:creationId xmlns:a16="http://schemas.microsoft.com/office/drawing/2014/main" id="{FF9CC1E1-0A0B-4C17-89E7-9A788DC66637}"/>
               </a:ext>
             </a:extLst>
           </p:cNvPr>
@@ -3381,7 +3381,7 @@
           <p:cNvPr id="3" name="">
             <a:extLst xmlns:a="http://schemas.openxmlformats.org/drawingml/2006/main">
               <a:ext uri="{FF2B5EF4-FFF2-40B4-BE49-F238E27FC236}">
-                <a16:creationId xmlns:a16="http://schemas.microsoft.com/office/drawing/2014/main" id="{0A3C1757-E33D-4D81-B0D1-F4E8FA34DBF4}"/>
+                <a16:creationId xmlns:a16="http://schemas.microsoft.com/office/drawing/2014/main" id="{0D14ADCC-8953-482E-8452-F4BB59CD5211}"/>
               </a:ext>
             </a:extLst>
           </p:cNvPr>
@@ -3413,7 +3413,7 @@
           <p:cNvPr id="4" name="">
             <a:extLst xmlns:a="http://schemas.openxmlformats.org/drawingml/2006/main">
               <a:ext uri="{FF2B5EF4-FFF2-40B4-BE49-F238E27FC236}">
-                <a16:creationId xmlns:a16="http://schemas.microsoft.com/office/drawing/2014/main" id="{968ACC28-1D9E-468E-BEEE-F1568781A571}"/>
+                <a16:creationId xmlns:a16="http://schemas.microsoft.com/office/drawing/2014/main" id="{8872CA96-C96C-47FA-BCEC-99C0B18F4064}"/>
               </a:ext>
             </a:extLst>
           </p:cNvPr>
@@ -3470,7 +3470,7 @@
           <p:cNvPr id="5" name="">
             <a:extLst xmlns:a="http://schemas.openxmlformats.org/drawingml/2006/main">
               <a:ext uri="{FF2B5EF4-FFF2-40B4-BE49-F238E27FC236}">
-                <a16:creationId xmlns:a16="http://schemas.microsoft.com/office/drawing/2014/main" id="{CA1AAFF0-BA0F-4AA4-8226-841F38CF9AF5}"/>
+                <a16:creationId xmlns:a16="http://schemas.microsoft.com/office/drawing/2014/main" id="{E842359F-F347-4565-A012-23C1307DC2F2}"/>
               </a:ext>
             </a:extLst>
           </p:cNvPr>
@@ -3527,7 +3527,7 @@
           <p:cNvPr id="6" name="">
             <a:extLst xmlns:a="http://schemas.openxmlformats.org/drawingml/2006/main">
               <a:ext uri="{FF2B5EF4-FFF2-40B4-BE49-F238E27FC236}">
-                <a16:creationId xmlns:a16="http://schemas.microsoft.com/office/drawing/2014/main" id="{3CAE3BEB-CBC6-4201-A813-94866076B0A5}"/>
+                <a16:creationId xmlns:a16="http://schemas.microsoft.com/office/drawing/2014/main" id="{8BA6F6CF-74F5-4778-8342-402B4CE61C00}"/>
               </a:ext>
             </a:extLst>
           </p:cNvPr>
@@ -3584,7 +3584,7 @@
           <p:cNvPr id="7" name="">
             <a:extLst xmlns:a="http://schemas.openxmlformats.org/drawingml/2006/main">
               <a:ext uri="{FF2B5EF4-FFF2-40B4-BE49-F238E27FC236}">
-                <a16:creationId xmlns:a16="http://schemas.microsoft.com/office/drawing/2014/main" id="{3E94211A-4A9E-40D0-8537-26C74BBA4B11}"/>
+                <a16:creationId xmlns:a16="http://schemas.microsoft.com/office/drawing/2014/main" id="{BDEDDC48-1BEA-4C4F-95DE-7300CECA9D8A}"/>
               </a:ext>
             </a:extLst>
           </p:cNvPr>
@@ -3616,7 +3616,7 @@
           <p:cNvPr id="8" name="">
             <a:extLst xmlns:a="http://schemas.openxmlformats.org/drawingml/2006/main">
               <a:ext uri="{FF2B5EF4-FFF2-40B4-BE49-F238E27FC236}">
-                <a16:creationId xmlns:a16="http://schemas.microsoft.com/office/drawing/2014/main" id="{1BAAAC93-1300-4757-AC06-9AD50857890A}"/>
+                <a16:creationId xmlns:a16="http://schemas.microsoft.com/office/drawing/2014/main" id="{1935B3B4-D195-4076-A48A-C5842123236F}"/>
               </a:ext>
             </a:extLst>
           </p:cNvPr>
@@ -3673,7 +3673,7 @@
           <p:cNvPr id="9" name="">
             <a:extLst xmlns:a="http://schemas.openxmlformats.org/drawingml/2006/main">
               <a:ext uri="{FF2B5EF4-FFF2-40B4-BE49-F238E27FC236}">
-                <a16:creationId xmlns:a16="http://schemas.microsoft.com/office/drawing/2014/main" id="{E3DC4099-5D81-4746-A0C4-8C3F92F24370}"/>
+                <a16:creationId xmlns:a16="http://schemas.microsoft.com/office/drawing/2014/main" id="{573B6C62-6BDE-4D7C-960F-72FE4206E3D9}"/>
               </a:ext>
             </a:extLst>
           </p:cNvPr>
@@ -3730,7 +3730,7 @@
           <p:cNvPr id="10" name="">
             <a:extLst xmlns:a="http://schemas.openxmlformats.org/drawingml/2006/main">
               <a:ext uri="{FF2B5EF4-FFF2-40B4-BE49-F238E27FC236}">
-                <a16:creationId xmlns:a16="http://schemas.microsoft.com/office/drawing/2014/main" id="{4D994D11-04E7-4AF6-8B7F-F467604C6D86}"/>
+                <a16:creationId xmlns:a16="http://schemas.microsoft.com/office/drawing/2014/main" id="{5FCDCE7C-A987-4492-9F42-74EE5D19AEBA}"/>
               </a:ext>
             </a:extLst>
           </p:cNvPr>
@@ -3787,7 +3787,7 @@
           <p:cNvPr id="11" name="">
             <a:extLst xmlns:a="http://schemas.openxmlformats.org/drawingml/2006/main">
               <a:ext uri="{FF2B5EF4-FFF2-40B4-BE49-F238E27FC236}">
-                <a16:creationId xmlns:a16="http://schemas.microsoft.com/office/drawing/2014/main" id="{94383716-F0BA-4047-87BE-A152ECD72E57}"/>
+                <a16:creationId xmlns:a16="http://schemas.microsoft.com/office/drawing/2014/main" id="{07ADD78A-6134-4B23-B813-7C7C809C5AE8}"/>
               </a:ext>
             </a:extLst>
           </p:cNvPr>
@@ -3821,7 +3821,7 @@
           <p:cNvPr id="12" name="">
             <a:extLst xmlns:a="http://schemas.openxmlformats.org/drawingml/2006/main">
               <a:ext uri="{FF2B5EF4-FFF2-40B4-BE49-F238E27FC236}">
-                <a16:creationId xmlns:a16="http://schemas.microsoft.com/office/drawing/2014/main" id="{54F8B94B-8E01-4964-876C-8F040A94C459}"/>
+                <a16:creationId xmlns:a16="http://schemas.microsoft.com/office/drawing/2014/main" id="{DFD20482-56A6-4EBF-8CC2-CF941F8C9820}"/>
               </a:ext>
             </a:extLst>
           </p:cNvPr>
@@ -3878,7 +3878,7 @@
           <p:cNvPr id="13" name="">
             <a:extLst xmlns:a="http://schemas.openxmlformats.org/drawingml/2006/main">
               <a:ext uri="{FF2B5EF4-FFF2-40B4-BE49-F238E27FC236}">
-                <a16:creationId xmlns:a16="http://schemas.microsoft.com/office/drawing/2014/main" id="{6700AEB2-4F20-4295-8750-3C0BCB090547}"/>
+                <a16:creationId xmlns:a16="http://schemas.microsoft.com/office/drawing/2014/main" id="{D189A3AE-67C3-4014-B82C-A5C04E93216B}"/>
               </a:ext>
             </a:extLst>
           </p:cNvPr>
@@ -3935,7 +3935,7 @@
           <p:cNvPr id="14" name="">
             <a:extLst xmlns:a="http://schemas.openxmlformats.org/drawingml/2006/main">
               <a:ext uri="{FF2B5EF4-FFF2-40B4-BE49-F238E27FC236}">
-                <a16:creationId xmlns:a16="http://schemas.microsoft.com/office/drawing/2014/main" id="{068E1361-AD91-4385-BFAA-6469F5BB14D5}"/>
+                <a16:creationId xmlns:a16="http://schemas.microsoft.com/office/drawing/2014/main" id="{A0DDBFA5-6D8D-4064-9EF8-A1556C64C012}"/>
               </a:ext>
             </a:extLst>
           </p:cNvPr>
@@ -3992,7 +3992,7 @@
           <p:cNvPr id="15" name="">
             <a:extLst xmlns:a="http://schemas.openxmlformats.org/drawingml/2006/main">
               <a:ext uri="{FF2B5EF4-FFF2-40B4-BE49-F238E27FC236}">
-                <a16:creationId xmlns:a16="http://schemas.microsoft.com/office/drawing/2014/main" id="{C2CA514C-6F50-4106-9F3C-FC5FC6B1CF5D}"/>
+                <a16:creationId xmlns:a16="http://schemas.microsoft.com/office/drawing/2014/main" id="{E376608F-F5F3-4F38-A22C-399654150830}"/>
               </a:ext>
             </a:extLst>
           </p:cNvPr>
@@ -4026,7 +4026,7 @@
           <p:cNvPr id="16" name="">
             <a:extLst xmlns:a="http://schemas.openxmlformats.org/drawingml/2006/main">
               <a:ext uri="{FF2B5EF4-FFF2-40B4-BE49-F238E27FC236}">
-                <a16:creationId xmlns:a16="http://schemas.microsoft.com/office/drawing/2014/main" id="{499839CA-E93E-4C75-895E-58259079FD31}"/>
+                <a16:creationId xmlns:a16="http://schemas.microsoft.com/office/drawing/2014/main" id="{2979B410-6C22-49D9-8974-510C6F881AA9}"/>
               </a:ext>
             </a:extLst>
           </p:cNvPr>
@@ -4083,7 +4083,7 @@
           <p:cNvPr id="17" name="">
             <a:extLst xmlns:a="http://schemas.openxmlformats.org/drawingml/2006/main">
               <a:ext uri="{FF2B5EF4-FFF2-40B4-BE49-F238E27FC236}">
-                <a16:creationId xmlns:a16="http://schemas.microsoft.com/office/drawing/2014/main" id="{AA5DE2CB-DA99-41DB-8A07-1E3B7D04079C}"/>
+                <a16:creationId xmlns:a16="http://schemas.microsoft.com/office/drawing/2014/main" id="{CCDDF8AD-B542-4489-B18A-C5BD5FCE611A}"/>
               </a:ext>
             </a:extLst>
           </p:cNvPr>
@@ -4140,7 +4140,7 @@
           <p:cNvPr id="18" name="">
             <a:extLst xmlns:a="http://schemas.openxmlformats.org/drawingml/2006/main">
               <a:ext uri="{FF2B5EF4-FFF2-40B4-BE49-F238E27FC236}">
-                <a16:creationId xmlns:a16="http://schemas.microsoft.com/office/drawing/2014/main" id="{1DDBD3F6-57CA-49C1-A7CA-78354A78E076}"/>
+                <a16:creationId xmlns:a16="http://schemas.microsoft.com/office/drawing/2014/main" id="{593C7326-1D75-48FE-AD5E-1E704F5A88ED}"/>
               </a:ext>
             </a:extLst>
           </p:cNvPr>
@@ -4195,7 +4195,7 @@
     </p:spTree>
     <p:extLst>
       <p:ext uri="{BB962C8B-B14F-4D97-AF65-F5344CB8AC3E}">
-        <p14:creationId xmlns:p14="http://schemas.microsoft.com/office/powerpoint/2010/main" val="536127880"/>
+        <p14:creationId xmlns:p14="http://schemas.microsoft.com/office/powerpoint/2010/main" val="1805131529"/>
       </p:ext>
     </p:extLst>
   </p:cSld>
@@ -4350,7 +4350,7 @@
           <p:cNvPr id="23" name="">
             <a:extLst xmlns:a="http://schemas.openxmlformats.org/drawingml/2006/main">
               <a:ext uri="{FF2B5EF4-FFF2-40B4-BE49-F238E27FC236}">
-                <a16:creationId xmlns:a16="http://schemas.microsoft.com/office/drawing/2014/main" id="{0D3E52C5-6B37-4E21-A2D1-7E5B8D8E5B4B}"/>
+                <a16:creationId xmlns:a16="http://schemas.microsoft.com/office/drawing/2014/main" id="{DC7E0C29-EBFD-49AC-B36E-E99E8DEADBF0}"/>
               </a:ext>
             </a:extLst>
           </p:cNvPr>
@@ -4382,7 +4382,7 @@
           <p:cNvPr id="2" name="">
             <a:extLst xmlns:a="http://schemas.openxmlformats.org/drawingml/2006/main">
               <a:ext uri="{FF2B5EF4-FFF2-40B4-BE49-F238E27FC236}">
-                <a16:creationId xmlns:a16="http://schemas.microsoft.com/office/drawing/2014/main" id="{820CAE43-1F41-4949-AB16-0D7A402A5CEB}"/>
+                <a16:creationId xmlns:a16="http://schemas.microsoft.com/office/drawing/2014/main" id="{FC9AFB2C-E477-4D8C-8B0A-C97FF190CCD6}"/>
               </a:ext>
             </a:extLst>
           </p:cNvPr>
@@ -4439,7 +4439,7 @@
           <p:cNvPr id="3" name="">
             <a:extLst xmlns:a="http://schemas.openxmlformats.org/drawingml/2006/main">
               <a:ext uri="{FF2B5EF4-FFF2-40B4-BE49-F238E27FC236}">
-                <a16:creationId xmlns:a16="http://schemas.microsoft.com/office/drawing/2014/main" id="{801E9375-28C8-4AAE-A2FB-6F58E80B0187}"/>
+                <a16:creationId xmlns:a16="http://schemas.microsoft.com/office/drawing/2014/main" id="{A0755D3C-C934-49C2-B91C-1B03DD722C56}"/>
               </a:ext>
             </a:extLst>
           </p:cNvPr>
@@ -4471,7 +4471,7 @@
           <p:cNvPr id="4" name="">
             <a:extLst xmlns:a="http://schemas.openxmlformats.org/drawingml/2006/main">
               <a:ext uri="{FF2B5EF4-FFF2-40B4-BE49-F238E27FC236}">
-                <a16:creationId xmlns:a16="http://schemas.microsoft.com/office/drawing/2014/main" id="{1AF2C009-6042-4647-9547-9C73F1AEDFEB}"/>
+                <a16:creationId xmlns:a16="http://schemas.microsoft.com/office/drawing/2014/main" id="{828C7912-456E-4B4D-84F9-393F18D39F97}"/>
               </a:ext>
             </a:extLst>
           </p:cNvPr>
@@ -4528,7 +4528,7 @@
           <p:cNvPr id="5" name="">
             <a:extLst xmlns:a="http://schemas.openxmlformats.org/drawingml/2006/main">
               <a:ext uri="{FF2B5EF4-FFF2-40B4-BE49-F238E27FC236}">
-                <a16:creationId xmlns:a16="http://schemas.microsoft.com/office/drawing/2014/main" id="{352F267F-F809-4A50-89FB-DC494F4CCF8D}"/>
+                <a16:creationId xmlns:a16="http://schemas.microsoft.com/office/drawing/2014/main" id="{C2B7CA38-DF40-4673-A7DC-DE9FD4C2C81F}"/>
               </a:ext>
             </a:extLst>
           </p:cNvPr>
@@ -4585,7 +4585,7 @@
           <p:cNvPr id="6" name="">
             <a:extLst xmlns:a="http://schemas.openxmlformats.org/drawingml/2006/main">
               <a:ext uri="{FF2B5EF4-FFF2-40B4-BE49-F238E27FC236}">
-                <a16:creationId xmlns:a16="http://schemas.microsoft.com/office/drawing/2014/main" id="{C5223DE9-A5EC-4A99-99A2-36F87E85431F}"/>
+                <a16:creationId xmlns:a16="http://schemas.microsoft.com/office/drawing/2014/main" id="{BA8B0C2C-D634-458B-91EE-D3481BE65B3B}"/>
               </a:ext>
             </a:extLst>
           </p:cNvPr>
@@ -4642,7 +4642,7 @@
           <p:cNvPr id="7" name="">
             <a:extLst xmlns:a="http://schemas.openxmlformats.org/drawingml/2006/main">
               <a:ext uri="{FF2B5EF4-FFF2-40B4-BE49-F238E27FC236}">
-                <a16:creationId xmlns:a16="http://schemas.microsoft.com/office/drawing/2014/main" id="{A4B39CC9-E523-4D35-BBB4-7E9690A23D43}"/>
+                <a16:creationId xmlns:a16="http://schemas.microsoft.com/office/drawing/2014/main" id="{8798A2D0-E92B-409D-A26C-B167EF665B6D}"/>
               </a:ext>
             </a:extLst>
           </p:cNvPr>
@@ -4674,7 +4674,7 @@
           <p:cNvPr id="8" name="">
             <a:extLst xmlns:a="http://schemas.openxmlformats.org/drawingml/2006/main">
               <a:ext uri="{FF2B5EF4-FFF2-40B4-BE49-F238E27FC236}">
-                <a16:creationId xmlns:a16="http://schemas.microsoft.com/office/drawing/2014/main" id="{7E0A2887-95B1-40CB-BFC0-393102FF333A}"/>
+                <a16:creationId xmlns:a16="http://schemas.microsoft.com/office/drawing/2014/main" id="{D371151C-63AC-4795-811A-1702DBA919DD}"/>
               </a:ext>
             </a:extLst>
           </p:cNvPr>
@@ -4731,7 +4731,7 @@
           <p:cNvPr id="9" name="">
             <a:extLst xmlns:a="http://schemas.openxmlformats.org/drawingml/2006/main">
               <a:ext uri="{FF2B5EF4-FFF2-40B4-BE49-F238E27FC236}">
-                <a16:creationId xmlns:a16="http://schemas.microsoft.com/office/drawing/2014/main" id="{B3E92979-294F-4308-A35D-F6B352F45DEE}"/>
+                <a16:creationId xmlns:a16="http://schemas.microsoft.com/office/drawing/2014/main" id="{3C92FF6E-D76B-4442-A6CE-22B1B1037B0E}"/>
               </a:ext>
             </a:extLst>
           </p:cNvPr>
@@ -4788,7 +4788,7 @@
           <p:cNvPr id="10" name="">
             <a:extLst xmlns:a="http://schemas.openxmlformats.org/drawingml/2006/main">
               <a:ext uri="{FF2B5EF4-FFF2-40B4-BE49-F238E27FC236}">
-                <a16:creationId xmlns:a16="http://schemas.microsoft.com/office/drawing/2014/main" id="{797BAA04-CE9C-4ADE-BCB1-32D0A6ED9468}"/>
+                <a16:creationId xmlns:a16="http://schemas.microsoft.com/office/drawing/2014/main" id="{4519933A-810E-44E2-96E1-B2520A18DB1A}"/>
               </a:ext>
             </a:extLst>
           </p:cNvPr>
@@ -4822,7 +4822,7 @@
           <p:cNvPr id="11" name="">
             <a:extLst xmlns:a="http://schemas.openxmlformats.org/drawingml/2006/main">
               <a:ext uri="{FF2B5EF4-FFF2-40B4-BE49-F238E27FC236}">
-                <a16:creationId xmlns:a16="http://schemas.microsoft.com/office/drawing/2014/main" id="{2EE9AC42-F8DB-46A7-AF17-C2C42F7080E0}"/>
+                <a16:creationId xmlns:a16="http://schemas.microsoft.com/office/drawing/2014/main" id="{A2643372-4352-42EE-848A-A729D948AD4F}"/>
               </a:ext>
             </a:extLst>
           </p:cNvPr>
@@ -4854,7 +4854,7 @@
           <p:cNvPr id="12" name="">
             <a:extLst xmlns:a="http://schemas.openxmlformats.org/drawingml/2006/main">
               <a:ext uri="{FF2B5EF4-FFF2-40B4-BE49-F238E27FC236}">
-                <a16:creationId xmlns:a16="http://schemas.microsoft.com/office/drawing/2014/main" id="{A824BDD8-8F53-44F2-AF51-7F60EDF7DCF9}"/>
+                <a16:creationId xmlns:a16="http://schemas.microsoft.com/office/drawing/2014/main" id="{A714EFC2-7EB3-45E0-B5C5-396EDCFA56FA}"/>
               </a:ext>
             </a:extLst>
           </p:cNvPr>
@@ -4911,7 +4911,7 @@
           <p:cNvPr id="13" name="">
             <a:extLst xmlns:a="http://schemas.openxmlformats.org/drawingml/2006/main">
               <a:ext uri="{FF2B5EF4-FFF2-40B4-BE49-F238E27FC236}">
-                <a16:creationId xmlns:a16="http://schemas.microsoft.com/office/drawing/2014/main" id="{136D1E66-B549-48E5-925C-03E39911B850}"/>
+                <a16:creationId xmlns:a16="http://schemas.microsoft.com/office/drawing/2014/main" id="{4BED6317-E0CC-42F4-B4DD-CF4EA6C6AAE0}"/>
               </a:ext>
             </a:extLst>
           </p:cNvPr>
@@ -4968,7 +4968,7 @@
           <p:cNvPr id="14" name="">
             <a:extLst xmlns:a="http://schemas.openxmlformats.org/drawingml/2006/main">
               <a:ext uri="{FF2B5EF4-FFF2-40B4-BE49-F238E27FC236}">
-                <a16:creationId xmlns:a16="http://schemas.microsoft.com/office/drawing/2014/main" id="{854B8C06-038F-4150-9B6E-6CD9D28E38AA}"/>
+                <a16:creationId xmlns:a16="http://schemas.microsoft.com/office/drawing/2014/main" id="{A5AFD652-E088-47D3-B043-54E781B1F7EE}"/>
               </a:ext>
             </a:extLst>
           </p:cNvPr>
@@ -5002,7 +5002,7 @@
           <p:cNvPr id="15" name="">
             <a:extLst xmlns:a="http://schemas.openxmlformats.org/drawingml/2006/main">
               <a:ext uri="{FF2B5EF4-FFF2-40B4-BE49-F238E27FC236}">
-                <a16:creationId xmlns:a16="http://schemas.microsoft.com/office/drawing/2014/main" id="{6832AAB2-A6C3-4498-89B9-94E93C463118}"/>
+                <a16:creationId xmlns:a16="http://schemas.microsoft.com/office/drawing/2014/main" id="{40089BAE-017E-47F7-92AA-938855F7B2FE}"/>
               </a:ext>
             </a:extLst>
           </p:cNvPr>
@@ -5034,7 +5034,7 @@
           <p:cNvPr id="16" name="">
             <a:extLst xmlns:a="http://schemas.openxmlformats.org/drawingml/2006/main">
               <a:ext uri="{FF2B5EF4-FFF2-40B4-BE49-F238E27FC236}">
-                <a16:creationId xmlns:a16="http://schemas.microsoft.com/office/drawing/2014/main" id="{0976CB9C-F04A-4BA4-A99C-37F80A33FD21}"/>
+                <a16:creationId xmlns:a16="http://schemas.microsoft.com/office/drawing/2014/main" id="{631BC395-65C2-491B-B8A1-E7A716C6F073}"/>
               </a:ext>
             </a:extLst>
           </p:cNvPr>
@@ -5091,7 +5091,7 @@
           <p:cNvPr id="17" name="">
             <a:extLst xmlns:a="http://schemas.openxmlformats.org/drawingml/2006/main">
               <a:ext uri="{FF2B5EF4-FFF2-40B4-BE49-F238E27FC236}">
-                <a16:creationId xmlns:a16="http://schemas.microsoft.com/office/drawing/2014/main" id="{809910A6-1B19-4BA9-812A-8BD4FFE92F89}"/>
+                <a16:creationId xmlns:a16="http://schemas.microsoft.com/office/drawing/2014/main" id="{ED659278-815C-464A-AA8F-800DE4A7B3B3}"/>
               </a:ext>
             </a:extLst>
           </p:cNvPr>
@@ -5148,7 +5148,7 @@
           <p:cNvPr id="18" name="">
             <a:extLst xmlns:a="http://schemas.openxmlformats.org/drawingml/2006/main">
               <a:ext uri="{FF2B5EF4-FFF2-40B4-BE49-F238E27FC236}">
-                <a16:creationId xmlns:a16="http://schemas.microsoft.com/office/drawing/2014/main" id="{A4021FD7-AABD-4865-BC89-C0D2BA707CD5}"/>
+                <a16:creationId xmlns:a16="http://schemas.microsoft.com/office/drawing/2014/main" id="{F2D77893-4935-4A1B-BA15-6FCB21722501}"/>
               </a:ext>
             </a:extLst>
           </p:cNvPr>
@@ -5182,7 +5182,7 @@
           <p:cNvPr id="19" name="">
             <a:extLst xmlns:a="http://schemas.openxmlformats.org/drawingml/2006/main">
               <a:ext uri="{FF2B5EF4-FFF2-40B4-BE49-F238E27FC236}">
-                <a16:creationId xmlns:a16="http://schemas.microsoft.com/office/drawing/2014/main" id="{8FBD7090-57CC-4B2F-8DFF-7B3811DD5255}"/>
+                <a16:creationId xmlns:a16="http://schemas.microsoft.com/office/drawing/2014/main" id="{C7AD832B-78C5-45C4-81AE-9B33A6B1CF3D}"/>
               </a:ext>
             </a:extLst>
           </p:cNvPr>
@@ -5214,7 +5214,7 @@
           <p:cNvPr id="20" name="">
             <a:extLst xmlns:a="http://schemas.openxmlformats.org/drawingml/2006/main">
               <a:ext uri="{FF2B5EF4-FFF2-40B4-BE49-F238E27FC236}">
-                <a16:creationId xmlns:a16="http://schemas.microsoft.com/office/drawing/2014/main" id="{47B3D427-3D37-4386-9775-ADECCA505657}"/>
+                <a16:creationId xmlns:a16="http://schemas.microsoft.com/office/drawing/2014/main" id="{A96E2104-18F4-4C4D-8791-3295348F9573}"/>
               </a:ext>
             </a:extLst>
           </p:cNvPr>
@@ -5271,7 +5271,7 @@
           <p:cNvPr id="21" name="">
             <a:extLst xmlns:a="http://schemas.openxmlformats.org/drawingml/2006/main">
               <a:ext uri="{FF2B5EF4-FFF2-40B4-BE49-F238E27FC236}">
-                <a16:creationId xmlns:a16="http://schemas.microsoft.com/office/drawing/2014/main" id="{E2E2C013-8FD0-49E4-BE0B-13D5EC2E95BE}"/>
+                <a16:creationId xmlns:a16="http://schemas.microsoft.com/office/drawing/2014/main" id="{207EF3F4-36FB-430D-A517-69F49CAD05A8}"/>
               </a:ext>
             </a:extLst>
           </p:cNvPr>
@@ -5328,7 +5328,7 @@
           <p:cNvPr id="22" name="">
             <a:extLst xmlns:a="http://schemas.openxmlformats.org/drawingml/2006/main">
               <a:ext uri="{FF2B5EF4-FFF2-40B4-BE49-F238E27FC236}">
-                <a16:creationId xmlns:a16="http://schemas.microsoft.com/office/drawing/2014/main" id="{35727F9E-A4B0-4AE7-A9CD-852E3792711E}"/>
+                <a16:creationId xmlns:a16="http://schemas.microsoft.com/office/drawing/2014/main" id="{1D4CA106-9B96-4449-AAC6-8490286826C6}"/>
               </a:ext>
             </a:extLst>
           </p:cNvPr>
@@ -5383,7 +5383,7 @@
     </p:spTree>
     <p:extLst>
       <p:ext uri="{BB962C8B-B14F-4D97-AF65-F5344CB8AC3E}">
-        <p14:creationId xmlns:p14="http://schemas.microsoft.com/office/powerpoint/2010/main" val="65550648"/>
+        <p14:creationId xmlns:p14="http://schemas.microsoft.com/office/powerpoint/2010/main" val="92878645"/>
       </p:ext>
     </p:extLst>
   </p:cSld>
@@ -5584,7 +5584,7 @@
           <p:cNvPr id="23" name="">
             <a:extLst xmlns:a="http://schemas.openxmlformats.org/drawingml/2006/main">
               <a:ext uri="{FF2B5EF4-FFF2-40B4-BE49-F238E27FC236}">
-                <a16:creationId xmlns:a16="http://schemas.microsoft.com/office/drawing/2014/main" id="{C8EFB3DF-7356-4726-9984-74AED848E43D}"/>
+                <a16:creationId xmlns:a16="http://schemas.microsoft.com/office/drawing/2014/main" id="{D6B8B511-94CD-4547-997C-C1CE89635BD2}"/>
               </a:ext>
             </a:extLst>
           </p:cNvPr>
@@ -5616,7 +5616,7 @@
           <p:cNvPr id="2" name="">
             <a:extLst xmlns:a="http://schemas.openxmlformats.org/drawingml/2006/main">
               <a:ext uri="{FF2B5EF4-FFF2-40B4-BE49-F238E27FC236}">
-                <a16:creationId xmlns:a16="http://schemas.microsoft.com/office/drawing/2014/main" id="{664814CC-825D-40C2-86EC-A9EEAFC2E656}"/>
+                <a16:creationId xmlns:a16="http://schemas.microsoft.com/office/drawing/2014/main" id="{485405A8-8986-49EB-81F9-AE88AA7729E8}"/>
               </a:ext>
             </a:extLst>
           </p:cNvPr>
@@ -5673,7 +5673,7 @@
           <p:cNvPr id="3" name="">
             <a:extLst xmlns:a="http://schemas.openxmlformats.org/drawingml/2006/main">
               <a:ext uri="{FF2B5EF4-FFF2-40B4-BE49-F238E27FC236}">
-                <a16:creationId xmlns:a16="http://schemas.microsoft.com/office/drawing/2014/main" id="{6AD9ABEF-4BEF-487E-8609-C426537385CA}"/>
+                <a16:creationId xmlns:a16="http://schemas.microsoft.com/office/drawing/2014/main" id="{CF466524-076C-4034-BC77-67A29B56AA22}"/>
               </a:ext>
             </a:extLst>
           </p:cNvPr>
@@ -5705,7 +5705,7 @@
           <p:cNvPr id="4" name="">
             <a:extLst xmlns:a="http://schemas.openxmlformats.org/drawingml/2006/main">
               <a:ext uri="{FF2B5EF4-FFF2-40B4-BE49-F238E27FC236}">
-                <a16:creationId xmlns:a16="http://schemas.microsoft.com/office/drawing/2014/main" id="{A4A3E4A8-9DDE-4770-B09C-8F0BFE51E15D}"/>
+                <a16:creationId xmlns:a16="http://schemas.microsoft.com/office/drawing/2014/main" id="{1249455C-AFDB-4F10-BB6D-BBE10A7F0155}"/>
               </a:ext>
             </a:extLst>
           </p:cNvPr>
@@ -5762,7 +5762,7 @@
           <p:cNvPr id="5" name="">
             <a:extLst xmlns:a="http://schemas.openxmlformats.org/drawingml/2006/main">
               <a:ext uri="{FF2B5EF4-FFF2-40B4-BE49-F238E27FC236}">
-                <a16:creationId xmlns:a16="http://schemas.microsoft.com/office/drawing/2014/main" id="{C06E1227-8455-464C-A5F0-74A0F99343CF}"/>
+                <a16:creationId xmlns:a16="http://schemas.microsoft.com/office/drawing/2014/main" id="{776E7F52-C934-48D6-9EE0-1F1D0F67C619}"/>
               </a:ext>
             </a:extLst>
           </p:cNvPr>
@@ -5819,7 +5819,7 @@
           <p:cNvPr id="6" name="">
             <a:extLst xmlns:a="http://schemas.openxmlformats.org/drawingml/2006/main">
               <a:ext uri="{FF2B5EF4-FFF2-40B4-BE49-F238E27FC236}">
-                <a16:creationId xmlns:a16="http://schemas.microsoft.com/office/drawing/2014/main" id="{ACF1858F-F444-4EA6-AC6C-FBC294E586AD}"/>
+                <a16:creationId xmlns:a16="http://schemas.microsoft.com/office/drawing/2014/main" id="{815BCE7E-FCCE-4C95-82B4-0C5361D064DC}"/>
               </a:ext>
             </a:extLst>
           </p:cNvPr>
@@ -5876,7 +5876,7 @@
           <p:cNvPr id="7" name="">
             <a:extLst xmlns:a="http://schemas.openxmlformats.org/drawingml/2006/main">
               <a:ext uri="{FF2B5EF4-FFF2-40B4-BE49-F238E27FC236}">
-                <a16:creationId xmlns:a16="http://schemas.microsoft.com/office/drawing/2014/main" id="{F03EF0F7-5561-46D2-9079-21893D1D868B}"/>
+                <a16:creationId xmlns:a16="http://schemas.microsoft.com/office/drawing/2014/main" id="{6906D050-044A-46A1-BC95-1F47C5BB1C0A}"/>
               </a:ext>
             </a:extLst>
           </p:cNvPr>
@@ -5908,7 +5908,7 @@
           <p:cNvPr id="8" name="">
             <a:extLst xmlns:a="http://schemas.openxmlformats.org/drawingml/2006/main">
               <a:ext uri="{FF2B5EF4-FFF2-40B4-BE49-F238E27FC236}">
-                <a16:creationId xmlns:a16="http://schemas.microsoft.com/office/drawing/2014/main" id="{8CBAB244-232F-436D-9B7D-A733120E964C}"/>
+                <a16:creationId xmlns:a16="http://schemas.microsoft.com/office/drawing/2014/main" id="{C8709DE6-1351-4E63-96C8-0EB761839C26}"/>
               </a:ext>
             </a:extLst>
           </p:cNvPr>
@@ -5965,7 +5965,7 @@
           <p:cNvPr id="9" name="">
             <a:extLst xmlns:a="http://schemas.openxmlformats.org/drawingml/2006/main">
               <a:ext uri="{FF2B5EF4-FFF2-40B4-BE49-F238E27FC236}">
-                <a16:creationId xmlns:a16="http://schemas.microsoft.com/office/drawing/2014/main" id="{A0AADCEE-C3AF-48D8-B8CB-396C33B85DED}"/>
+                <a16:creationId xmlns:a16="http://schemas.microsoft.com/office/drawing/2014/main" id="{3448DF84-B8A7-4EA5-892B-BA15DF106C4E}"/>
               </a:ext>
             </a:extLst>
           </p:cNvPr>
@@ -6022,7 +6022,7 @@
           <p:cNvPr id="10" name="">
             <a:extLst xmlns:a="http://schemas.openxmlformats.org/drawingml/2006/main">
               <a:ext uri="{FF2B5EF4-FFF2-40B4-BE49-F238E27FC236}">
-                <a16:creationId xmlns:a16="http://schemas.microsoft.com/office/drawing/2014/main" id="{C6E14124-9979-4A72-992C-706B70AE2B4A}"/>
+                <a16:creationId xmlns:a16="http://schemas.microsoft.com/office/drawing/2014/main" id="{8E49CCB8-9BDC-49A8-9841-37DC533C4C40}"/>
               </a:ext>
             </a:extLst>
           </p:cNvPr>
@@ -6056,7 +6056,7 @@
           <p:cNvPr id="11" name="">
             <a:extLst xmlns:a="http://schemas.openxmlformats.org/drawingml/2006/main">
               <a:ext uri="{FF2B5EF4-FFF2-40B4-BE49-F238E27FC236}">
-                <a16:creationId xmlns:a16="http://schemas.microsoft.com/office/drawing/2014/main" id="{0113CDC8-262F-4E1D-A5F1-CB2DD11C5527}"/>
+                <a16:creationId xmlns:a16="http://schemas.microsoft.com/office/drawing/2014/main" id="{D7AD0555-CDC4-480D-88B6-CAD2EA2EE73B}"/>
               </a:ext>
             </a:extLst>
           </p:cNvPr>
@@ -6088,7 +6088,7 @@
           <p:cNvPr id="12" name="">
             <a:extLst xmlns:a="http://schemas.openxmlformats.org/drawingml/2006/main">
               <a:ext uri="{FF2B5EF4-FFF2-40B4-BE49-F238E27FC236}">
-                <a16:creationId xmlns:a16="http://schemas.microsoft.com/office/drawing/2014/main" id="{4B07F6D2-F15D-4F69-8126-35202FE733D8}"/>
+                <a16:creationId xmlns:a16="http://schemas.microsoft.com/office/drawing/2014/main" id="{364CE16E-3B39-409D-9A97-E0843B9E686C}"/>
               </a:ext>
             </a:extLst>
           </p:cNvPr>
@@ -6145,7 +6145,7 @@
           <p:cNvPr id="13" name="">
             <a:extLst xmlns:a="http://schemas.openxmlformats.org/drawingml/2006/main">
               <a:ext uri="{FF2B5EF4-FFF2-40B4-BE49-F238E27FC236}">
-                <a16:creationId xmlns:a16="http://schemas.microsoft.com/office/drawing/2014/main" id="{8F559559-528E-428E-AEC5-DF89E9461C95}"/>
+                <a16:creationId xmlns:a16="http://schemas.microsoft.com/office/drawing/2014/main" id="{409114FD-CA18-484E-A788-E47ED15D1446}"/>
               </a:ext>
             </a:extLst>
           </p:cNvPr>
@@ -6202,7 +6202,7 @@
           <p:cNvPr id="14" name="">
             <a:extLst xmlns:a="http://schemas.openxmlformats.org/drawingml/2006/main">
               <a:ext uri="{FF2B5EF4-FFF2-40B4-BE49-F238E27FC236}">
-                <a16:creationId xmlns:a16="http://schemas.microsoft.com/office/drawing/2014/main" id="{3BDFD326-A28C-438B-9D89-64AA08447F42}"/>
+                <a16:creationId xmlns:a16="http://schemas.microsoft.com/office/drawing/2014/main" id="{59EF9ED3-9F83-4255-B619-6A3AD535B424}"/>
               </a:ext>
             </a:extLst>
           </p:cNvPr>
@@ -6236,7 +6236,7 @@
           <p:cNvPr id="15" name="">
             <a:extLst xmlns:a="http://schemas.openxmlformats.org/drawingml/2006/main">
               <a:ext uri="{FF2B5EF4-FFF2-40B4-BE49-F238E27FC236}">
-                <a16:creationId xmlns:a16="http://schemas.microsoft.com/office/drawing/2014/main" id="{AB6F9F3D-D607-4FF3-AEAD-517F1B51698E}"/>
+                <a16:creationId xmlns:a16="http://schemas.microsoft.com/office/drawing/2014/main" id="{2A2B7001-F9E2-434D-A3BD-1F2FDE60B125}"/>
               </a:ext>
             </a:extLst>
           </p:cNvPr>
@@ -6268,7 +6268,7 @@
           <p:cNvPr id="16" name="">
             <a:extLst xmlns:a="http://schemas.openxmlformats.org/drawingml/2006/main">
               <a:ext uri="{FF2B5EF4-FFF2-40B4-BE49-F238E27FC236}">
-                <a16:creationId xmlns:a16="http://schemas.microsoft.com/office/drawing/2014/main" id="{F4C60183-61A0-4B06-9DB9-184E8C4C00E1}"/>
+                <a16:creationId xmlns:a16="http://schemas.microsoft.com/office/drawing/2014/main" id="{EE722B02-59CF-4D92-A60E-595A14FF6AF4}"/>
               </a:ext>
             </a:extLst>
           </p:cNvPr>
@@ -6325,7 +6325,7 @@
           <p:cNvPr id="17" name="">
             <a:extLst xmlns:a="http://schemas.openxmlformats.org/drawingml/2006/main">
               <a:ext uri="{FF2B5EF4-FFF2-40B4-BE49-F238E27FC236}">
-                <a16:creationId xmlns:a16="http://schemas.microsoft.com/office/drawing/2014/main" id="{8D17CA98-094D-4AD6-8D39-99A3B54CDCB5}"/>
+                <a16:creationId xmlns:a16="http://schemas.microsoft.com/office/drawing/2014/main" id="{D1D5F701-16C6-47AE-B5B1-8977C5144ED2}"/>
               </a:ext>
             </a:extLst>
           </p:cNvPr>
@@ -6382,7 +6382,7 @@
           <p:cNvPr id="18" name="">
             <a:extLst xmlns:a="http://schemas.openxmlformats.org/drawingml/2006/main">
               <a:ext uri="{FF2B5EF4-FFF2-40B4-BE49-F238E27FC236}">
-                <a16:creationId xmlns:a16="http://schemas.microsoft.com/office/drawing/2014/main" id="{5EB06E26-5D39-40CD-879B-85EEFC5FDF8F}"/>
+                <a16:creationId xmlns:a16="http://schemas.microsoft.com/office/drawing/2014/main" id="{8CFA53B6-575D-4BA6-B072-3E07A27B7AC9}"/>
               </a:ext>
             </a:extLst>
           </p:cNvPr>
@@ -6416,7 +6416,7 @@
           <p:cNvPr id="19" name="">
             <a:extLst xmlns:a="http://schemas.openxmlformats.org/drawingml/2006/main">
               <a:ext uri="{FF2B5EF4-FFF2-40B4-BE49-F238E27FC236}">
-                <a16:creationId xmlns:a16="http://schemas.microsoft.com/office/drawing/2014/main" id="{DCBB86B5-1F34-4DD4-9B2C-88CA11BF3C96}"/>
+                <a16:creationId xmlns:a16="http://schemas.microsoft.com/office/drawing/2014/main" id="{D64C286F-ACC3-4C50-9974-BD7BC4EECC8A}"/>
               </a:ext>
             </a:extLst>
           </p:cNvPr>
@@ -6448,7 +6448,7 @@
           <p:cNvPr id="20" name="">
             <a:extLst xmlns:a="http://schemas.openxmlformats.org/drawingml/2006/main">
               <a:ext uri="{FF2B5EF4-FFF2-40B4-BE49-F238E27FC236}">
-                <a16:creationId xmlns:a16="http://schemas.microsoft.com/office/drawing/2014/main" id="{DE7221B7-A2DC-4F57-BDFD-70AD3EF9B269}"/>
+                <a16:creationId xmlns:a16="http://schemas.microsoft.com/office/drawing/2014/main" id="{BC9A30C9-0FDE-4AE1-AA22-14EACFDE869F}"/>
               </a:ext>
             </a:extLst>
           </p:cNvPr>
@@ -6505,7 +6505,7 @@
           <p:cNvPr id="21" name="">
             <a:extLst xmlns:a="http://schemas.openxmlformats.org/drawingml/2006/main">
               <a:ext uri="{FF2B5EF4-FFF2-40B4-BE49-F238E27FC236}">
-                <a16:creationId xmlns:a16="http://schemas.microsoft.com/office/drawing/2014/main" id="{E29CC16A-8B4C-4561-92C4-BB7982495FEF}"/>
+                <a16:creationId xmlns:a16="http://schemas.microsoft.com/office/drawing/2014/main" id="{9415DCEF-479A-4DD6-9C5F-316ED1A9A096}"/>
               </a:ext>
             </a:extLst>
           </p:cNvPr>
@@ -6562,7 +6562,7 @@
           <p:cNvPr id="22" name="">
             <a:extLst xmlns:a="http://schemas.openxmlformats.org/drawingml/2006/main">
               <a:ext uri="{FF2B5EF4-FFF2-40B4-BE49-F238E27FC236}">
-                <a16:creationId xmlns:a16="http://schemas.microsoft.com/office/drawing/2014/main" id="{B3F128D1-ACC9-4CEE-A6D7-F7F6B6702B16}"/>
+                <a16:creationId xmlns:a16="http://schemas.microsoft.com/office/drawing/2014/main" id="{F9E90D50-7CE0-4FCB-A88C-947837966FD8}"/>
               </a:ext>
             </a:extLst>
           </p:cNvPr>
@@ -6617,7 +6617,7 @@
     </p:spTree>
     <p:extLst>
       <p:ext uri="{BB962C8B-B14F-4D97-AF65-F5344CB8AC3E}">
-        <p14:creationId xmlns:p14="http://schemas.microsoft.com/office/powerpoint/2010/main" val="1183563855"/>
+        <p14:creationId xmlns:p14="http://schemas.microsoft.com/office/powerpoint/2010/main" val="6396706"/>
       </p:ext>
     </p:extLst>
   </p:cSld>
@@ -6818,7 +6818,7 @@
           <p:cNvPr id="16" name="">
             <a:extLst xmlns:a="http://schemas.openxmlformats.org/drawingml/2006/main">
               <a:ext uri="{FF2B5EF4-FFF2-40B4-BE49-F238E27FC236}">
-                <a16:creationId xmlns:a16="http://schemas.microsoft.com/office/drawing/2014/main" id="{0E7F8A6D-B77B-40B8-AECE-DB822FDC6A79}"/>
+                <a16:creationId xmlns:a16="http://schemas.microsoft.com/office/drawing/2014/main" id="{238682AE-850C-434D-9B80-0E437F3D1E63}"/>
               </a:ext>
             </a:extLst>
           </p:cNvPr>
@@ -6850,7 +6850,7 @@
           <p:cNvPr id="2" name="">
             <a:extLst xmlns:a="http://schemas.openxmlformats.org/drawingml/2006/main">
               <a:ext uri="{FF2B5EF4-FFF2-40B4-BE49-F238E27FC236}">
-                <a16:creationId xmlns:a16="http://schemas.microsoft.com/office/drawing/2014/main" id="{22F3B5B8-65FF-4FF9-A7B4-B55D7189F781}"/>
+                <a16:creationId xmlns:a16="http://schemas.microsoft.com/office/drawing/2014/main" id="{76D37121-975D-495F-8B6A-B4B7250642AB}"/>
               </a:ext>
             </a:extLst>
           </p:cNvPr>
@@ -6907,7 +6907,7 @@
           <p:cNvPr id="3" name="">
             <a:extLst xmlns:a="http://schemas.openxmlformats.org/drawingml/2006/main">
               <a:ext uri="{FF2B5EF4-FFF2-40B4-BE49-F238E27FC236}">
-                <a16:creationId xmlns:a16="http://schemas.microsoft.com/office/drawing/2014/main" id="{9391B312-6A61-4668-8239-31D01C8621FF}"/>
+                <a16:creationId xmlns:a16="http://schemas.microsoft.com/office/drawing/2014/main" id="{1B1C65B3-9BBC-4BCD-B95C-2FE94FB050EF}"/>
               </a:ext>
             </a:extLst>
           </p:cNvPr>
@@ -6939,7 +6939,7 @@
           <p:cNvPr id="4" name="">
             <a:extLst xmlns:a="http://schemas.openxmlformats.org/drawingml/2006/main">
               <a:ext uri="{FF2B5EF4-FFF2-40B4-BE49-F238E27FC236}">
-                <a16:creationId xmlns:a16="http://schemas.microsoft.com/office/drawing/2014/main" id="{51548EBD-CF30-43AF-9F66-6B13E4D36FEA}"/>
+                <a16:creationId xmlns:a16="http://schemas.microsoft.com/office/drawing/2014/main" id="{B5904A8D-E571-4B6A-B11E-C279A6EF6C20}"/>
               </a:ext>
             </a:extLst>
           </p:cNvPr>
@@ -6996,7 +6996,7 @@
           <p:cNvPr id="5" name="">
             <a:extLst xmlns:a="http://schemas.openxmlformats.org/drawingml/2006/main">
               <a:ext uri="{FF2B5EF4-FFF2-40B4-BE49-F238E27FC236}">
-                <a16:creationId xmlns:a16="http://schemas.microsoft.com/office/drawing/2014/main" id="{86051885-9F6E-49C8-9137-FED4969815B8}"/>
+                <a16:creationId xmlns:a16="http://schemas.microsoft.com/office/drawing/2014/main" id="{24D0DA04-143B-49DF-9ECB-8448A77FF738}"/>
               </a:ext>
             </a:extLst>
           </p:cNvPr>
@@ -7053,7 +7053,7 @@
           <p:cNvPr id="6" name="">
             <a:extLst xmlns:a="http://schemas.openxmlformats.org/drawingml/2006/main">
               <a:ext uri="{FF2B5EF4-FFF2-40B4-BE49-F238E27FC236}">
-                <a16:creationId xmlns:a16="http://schemas.microsoft.com/office/drawing/2014/main" id="{5BACA816-EC00-4873-842E-9119AE23353F}"/>
+                <a16:creationId xmlns:a16="http://schemas.microsoft.com/office/drawing/2014/main" id="{7037F892-117C-49DE-B03A-671097B8B20F}"/>
               </a:ext>
             </a:extLst>
           </p:cNvPr>
@@ -7110,7 +7110,7 @@
           <p:cNvPr id="7" name="">
             <a:extLst xmlns:a="http://schemas.openxmlformats.org/drawingml/2006/main">
               <a:ext uri="{FF2B5EF4-FFF2-40B4-BE49-F238E27FC236}">
-                <a16:creationId xmlns:a16="http://schemas.microsoft.com/office/drawing/2014/main" id="{26BA5003-B05E-43EF-9F61-7482639638E9}"/>
+                <a16:creationId xmlns:a16="http://schemas.microsoft.com/office/drawing/2014/main" id="{76DF01AE-7DC9-4046-84E1-085FFDE13E9E}"/>
               </a:ext>
             </a:extLst>
           </p:cNvPr>
@@ -7142,7 +7142,7 @@
           <p:cNvPr id="8" name="">
             <a:extLst xmlns:a="http://schemas.openxmlformats.org/drawingml/2006/main">
               <a:ext uri="{FF2B5EF4-FFF2-40B4-BE49-F238E27FC236}">
-                <a16:creationId xmlns:a16="http://schemas.microsoft.com/office/drawing/2014/main" id="{30DEDE82-010D-4226-97A8-FD0104490B40}"/>
+                <a16:creationId xmlns:a16="http://schemas.microsoft.com/office/drawing/2014/main" id="{6F11EA72-D5C8-43A9-82A7-56B7254D48B9}"/>
               </a:ext>
             </a:extLst>
           </p:cNvPr>
@@ -7199,7 +7199,7 @@
           <p:cNvPr id="9" name="">
             <a:extLst xmlns:a="http://schemas.openxmlformats.org/drawingml/2006/main">
               <a:ext uri="{FF2B5EF4-FFF2-40B4-BE49-F238E27FC236}">
-                <a16:creationId xmlns:a16="http://schemas.microsoft.com/office/drawing/2014/main" id="{B11B55E4-F993-43F8-AAF5-49DDB972E1FF}"/>
+                <a16:creationId xmlns:a16="http://schemas.microsoft.com/office/drawing/2014/main" id="{51252CAD-A833-4DA5-9CDD-6F625DC00745}"/>
               </a:ext>
             </a:extLst>
           </p:cNvPr>
@@ -7256,7 +7256,7 @@
           <p:cNvPr id="10" name="">
             <a:extLst xmlns:a="http://schemas.openxmlformats.org/drawingml/2006/main">
               <a:ext uri="{FF2B5EF4-FFF2-40B4-BE49-F238E27FC236}">
-                <a16:creationId xmlns:a16="http://schemas.microsoft.com/office/drawing/2014/main" id="{7DD19E3A-C630-43A1-8278-1480CC3029E2}"/>
+                <a16:creationId xmlns:a16="http://schemas.microsoft.com/office/drawing/2014/main" id="{53B32D18-2C92-4EC7-A822-E0A8003156A9}"/>
               </a:ext>
             </a:extLst>
           </p:cNvPr>
@@ -7313,7 +7313,7 @@
           <p:cNvPr id="11" name="">
             <a:extLst xmlns:a="http://schemas.openxmlformats.org/drawingml/2006/main">
               <a:ext uri="{FF2B5EF4-FFF2-40B4-BE49-F238E27FC236}">
-                <a16:creationId xmlns:a16="http://schemas.microsoft.com/office/drawing/2014/main" id="{4A12EB76-FFF3-4B06-ABC2-36BD0E68BA12}"/>
+                <a16:creationId xmlns:a16="http://schemas.microsoft.com/office/drawing/2014/main" id="{A7D4E6E6-8A1E-4A0B-BFDC-8D716C1F72BC}"/>
               </a:ext>
             </a:extLst>
           </p:cNvPr>
@@ -7345,7 +7345,7 @@
           <p:cNvPr id="12" name="">
             <a:extLst xmlns:a="http://schemas.openxmlformats.org/drawingml/2006/main">
               <a:ext uri="{FF2B5EF4-FFF2-40B4-BE49-F238E27FC236}">
-                <a16:creationId xmlns:a16="http://schemas.microsoft.com/office/drawing/2014/main" id="{D51AF6AD-D530-47CB-AB0D-166E070498F1}"/>
+                <a16:creationId xmlns:a16="http://schemas.microsoft.com/office/drawing/2014/main" id="{555EE0EB-5702-4269-B395-EF6C43494562}"/>
               </a:ext>
             </a:extLst>
           </p:cNvPr>
@@ -7402,7 +7402,7 @@
           <p:cNvPr id="13" name="">
             <a:extLst xmlns:a="http://schemas.openxmlformats.org/drawingml/2006/main">
               <a:ext uri="{FF2B5EF4-FFF2-40B4-BE49-F238E27FC236}">
-                <a16:creationId xmlns:a16="http://schemas.microsoft.com/office/drawing/2014/main" id="{E7D46758-CCBB-4FEF-8462-B6CEF1756F57}"/>
+                <a16:creationId xmlns:a16="http://schemas.microsoft.com/office/drawing/2014/main" id="{0FE8429E-18DC-4F37-91B2-E302324329DB}"/>
               </a:ext>
             </a:extLst>
           </p:cNvPr>
@@ -7459,7 +7459,7 @@
           <p:cNvPr id="14" name="">
             <a:extLst xmlns:a="http://schemas.openxmlformats.org/drawingml/2006/main">
               <a:ext uri="{FF2B5EF4-FFF2-40B4-BE49-F238E27FC236}">
-                <a16:creationId xmlns:a16="http://schemas.microsoft.com/office/drawing/2014/main" id="{C253D8F1-98DB-4714-99BA-1A6D1531D882}"/>
+                <a16:creationId xmlns:a16="http://schemas.microsoft.com/office/drawing/2014/main" id="{E8C19689-0F9B-4318-8DD0-4499572A5518}"/>
               </a:ext>
             </a:extLst>
           </p:cNvPr>
@@ -7516,7 +7516,7 @@
           <p:cNvPr id="15" name="">
             <a:extLst xmlns:a="http://schemas.openxmlformats.org/drawingml/2006/main">
               <a:ext uri="{FF2B5EF4-FFF2-40B4-BE49-F238E27FC236}">
-                <a16:creationId xmlns:a16="http://schemas.microsoft.com/office/drawing/2014/main" id="{211B5E31-2BCC-47D2-B9F5-491E57368171}"/>
+                <a16:creationId xmlns:a16="http://schemas.microsoft.com/office/drawing/2014/main" id="{B849F7EF-98C5-499D-82D1-9732FBDF45A6}"/>
               </a:ext>
             </a:extLst>
           </p:cNvPr>
@@ -7571,7 +7571,7 @@
     </p:spTree>
     <p:extLst>
       <p:ext uri="{BB962C8B-B14F-4D97-AF65-F5344CB8AC3E}">
-        <p14:creationId xmlns:p14="http://schemas.microsoft.com/office/powerpoint/2010/main" val="1209255296"/>
+        <p14:creationId xmlns:p14="http://schemas.microsoft.com/office/powerpoint/2010/main" val="1069974535"/>
       </p:ext>
     </p:extLst>
   </p:cSld>
@@ -7772,7 +7772,7 @@
           <p:cNvPr id="23" name="">
             <a:extLst xmlns:a="http://schemas.openxmlformats.org/drawingml/2006/main">
               <a:ext uri="{FF2B5EF4-FFF2-40B4-BE49-F238E27FC236}">
-                <a16:creationId xmlns:a16="http://schemas.microsoft.com/office/drawing/2014/main" id="{EBABC8EE-4513-40CB-8FCB-79B6CA5C195F}"/>
+                <a16:creationId xmlns:a16="http://schemas.microsoft.com/office/drawing/2014/main" id="{DAD04263-25B4-4A72-A4BE-BE72032DF93D}"/>
               </a:ext>
             </a:extLst>
           </p:cNvPr>
@@ -7804,7 +7804,7 @@
           <p:cNvPr id="2" name="">
             <a:extLst xmlns:a="http://schemas.openxmlformats.org/drawingml/2006/main">
               <a:ext uri="{FF2B5EF4-FFF2-40B4-BE49-F238E27FC236}">
-                <a16:creationId xmlns:a16="http://schemas.microsoft.com/office/drawing/2014/main" id="{9C51F447-F6D9-471A-B04F-C7E45DFD5D51}"/>
+                <a16:creationId xmlns:a16="http://schemas.microsoft.com/office/drawing/2014/main" id="{88F152CD-1916-4094-9098-A482982E3D62}"/>
               </a:ext>
             </a:extLst>
           </p:cNvPr>
@@ -7861,7 +7861,7 @@
           <p:cNvPr id="3" name="">
             <a:extLst xmlns:a="http://schemas.openxmlformats.org/drawingml/2006/main">
               <a:ext uri="{FF2B5EF4-FFF2-40B4-BE49-F238E27FC236}">
-                <a16:creationId xmlns:a16="http://schemas.microsoft.com/office/drawing/2014/main" id="{FBC705D1-7DE3-4FFE-A99D-51E894A402BB}"/>
+                <a16:creationId xmlns:a16="http://schemas.microsoft.com/office/drawing/2014/main" id="{D1322111-EFCD-4944-ABE3-94C9E0C00AF9}"/>
               </a:ext>
             </a:extLst>
           </p:cNvPr>
@@ -7893,7 +7893,7 @@
           <p:cNvPr id="4" name="">
             <a:extLst xmlns:a="http://schemas.openxmlformats.org/drawingml/2006/main">
               <a:ext uri="{FF2B5EF4-FFF2-40B4-BE49-F238E27FC236}">
-                <a16:creationId xmlns:a16="http://schemas.microsoft.com/office/drawing/2014/main" id="{53C72EE3-B8F8-4902-B941-2D086DD70A30}"/>
+                <a16:creationId xmlns:a16="http://schemas.microsoft.com/office/drawing/2014/main" id="{A9B3D85A-6061-4982-9DC9-7C58385D3255}"/>
               </a:ext>
             </a:extLst>
           </p:cNvPr>
@@ -7950,7 +7950,7 @@
           <p:cNvPr id="5" name="">
             <a:extLst xmlns:a="http://schemas.openxmlformats.org/drawingml/2006/main">
               <a:ext uri="{FF2B5EF4-FFF2-40B4-BE49-F238E27FC236}">
-                <a16:creationId xmlns:a16="http://schemas.microsoft.com/office/drawing/2014/main" id="{A29407D7-D85E-4838-90DF-1E0C448FA3CA}"/>
+                <a16:creationId xmlns:a16="http://schemas.microsoft.com/office/drawing/2014/main" id="{F18C61FA-F5E5-4776-8C87-6BBA88ECED33}"/>
               </a:ext>
             </a:extLst>
           </p:cNvPr>
@@ -8007,7 +8007,7 @@
           <p:cNvPr id="6" name="">
             <a:extLst xmlns:a="http://schemas.openxmlformats.org/drawingml/2006/main">
               <a:ext uri="{FF2B5EF4-FFF2-40B4-BE49-F238E27FC236}">
-                <a16:creationId xmlns:a16="http://schemas.microsoft.com/office/drawing/2014/main" id="{774016C3-CA05-4487-8818-CEDF5DA81103}"/>
+                <a16:creationId xmlns:a16="http://schemas.microsoft.com/office/drawing/2014/main" id="{08CC15B3-E8D6-46F5-A3C8-36E677253BBF}"/>
               </a:ext>
             </a:extLst>
           </p:cNvPr>
@@ -8064,7 +8064,7 @@
           <p:cNvPr id="7" name="">
             <a:extLst xmlns:a="http://schemas.openxmlformats.org/drawingml/2006/main">
               <a:ext uri="{FF2B5EF4-FFF2-40B4-BE49-F238E27FC236}">
-                <a16:creationId xmlns:a16="http://schemas.microsoft.com/office/drawing/2014/main" id="{FCD23BF5-CB70-406B-BD7E-9E57CD91D08F}"/>
+                <a16:creationId xmlns:a16="http://schemas.microsoft.com/office/drawing/2014/main" id="{4525ADE7-2893-49E0-920D-7F251F55D329}"/>
               </a:ext>
             </a:extLst>
           </p:cNvPr>
@@ -8096,7 +8096,7 @@
           <p:cNvPr id="8" name="">
             <a:extLst xmlns:a="http://schemas.openxmlformats.org/drawingml/2006/main">
               <a:ext uri="{FF2B5EF4-FFF2-40B4-BE49-F238E27FC236}">
-                <a16:creationId xmlns:a16="http://schemas.microsoft.com/office/drawing/2014/main" id="{FDEA82D5-089F-42FD-A5BD-E4471CF38949}"/>
+                <a16:creationId xmlns:a16="http://schemas.microsoft.com/office/drawing/2014/main" id="{0B6CBC86-D6D6-4AB9-9DF7-8BEA3FC7D5FE}"/>
               </a:ext>
             </a:extLst>
           </p:cNvPr>
@@ -8153,7 +8153,7 @@
           <p:cNvPr id="9" name="">
             <a:extLst xmlns:a="http://schemas.openxmlformats.org/drawingml/2006/main">
               <a:ext uri="{FF2B5EF4-FFF2-40B4-BE49-F238E27FC236}">
-                <a16:creationId xmlns:a16="http://schemas.microsoft.com/office/drawing/2014/main" id="{FF1C1F3A-F592-403E-8345-5A9105272EB4}"/>
+                <a16:creationId xmlns:a16="http://schemas.microsoft.com/office/drawing/2014/main" id="{25D29293-F7BB-4D4C-BE18-3FF0D45DE185}"/>
               </a:ext>
             </a:extLst>
           </p:cNvPr>
@@ -8210,19 +8210,19 @@
           <p:cNvPr id="10" name="">
             <a:extLst xmlns:a="http://schemas.openxmlformats.org/drawingml/2006/main">
               <a:ext uri="{FF2B5EF4-FFF2-40B4-BE49-F238E27FC236}">
-                <a16:creationId xmlns:a16="http://schemas.microsoft.com/office/drawing/2014/main" id="{D5DD9ACD-5AAD-402A-92AA-C71A10186C99}"/>
-              </a:ext>
-            </a:extLst>
-          </p:cNvPr>
-          <p:cNvSpPr>
-            <a:spLocks xmlns:a="http://schemas.openxmlformats.org/drawingml/2006/main" noGrp="1"/>
-          </p:cNvSpPr>
-          <p:nvPr/>
-        </p:nvSpPr>
-        <p:spPr>
-          <a:xfrm xmlns:a="http://schemas.openxmlformats.org/drawingml/2006/main">
-            <a:off x="914400" y="1257300"/>
-            <a:ext cx="10363200" cy="781050"/>
+                <a16:creationId xmlns:a16="http://schemas.microsoft.com/office/drawing/2014/main" id="{95596892-A73D-49D9-8CCA-555C36E76366}"/>
+              </a:ext>
+            </a:extLst>
+          </p:cNvPr>
+          <p:cNvSpPr>
+            <a:spLocks xmlns:a="http://schemas.openxmlformats.org/drawingml/2006/main" noGrp="1"/>
+          </p:cNvSpPr>
+          <p:nvPr/>
+        </p:nvSpPr>
+        <p:spPr>
+          <a:xfrm xmlns:a="http://schemas.openxmlformats.org/drawingml/2006/main">
+            <a:off x="857250" y="1219200"/>
+            <a:ext cx="10477500" cy="742950"/>
           </a:xfrm>
           <a:prstGeom xmlns:a="http://schemas.openxmlformats.org/drawingml/2006/main" prst="rect">
             <a:avLst/>
@@ -8239,7 +8239,7 @@
           <a:lstStyle xmlns:a="http://schemas.openxmlformats.org/drawingml/2006/main"/>
           <a:p xmlns:a="http://schemas.openxmlformats.org/drawingml/2006/main">
             <a:pPr algn="ctr">
-              <a:defRPr sz="2175" b="1">
+              <a:defRPr sz="2100" b="1">
                 <a:solidFill>
                   <a:srgbClr val="17253A"/>
                 </a:solidFill>
@@ -8249,7 +8249,7 @@
               </a:defRPr>
             </a:pPr>
             <a:r>
-              <a:rPr sz="2175" b="1">
+              <a:rPr sz="2100" b="1">
                 <a:solidFill>
                   <a:srgbClr val="17253A"/>
                 </a:solidFill>
@@ -8267,28 +8267,30 @@
           <p:cNvPr id="11" name="">
             <a:extLst xmlns:a="http://schemas.openxmlformats.org/drawingml/2006/main">
               <a:ext uri="{FF2B5EF4-FFF2-40B4-BE49-F238E27FC236}">
-                <a16:creationId xmlns:a16="http://schemas.microsoft.com/office/drawing/2014/main" id="{2BB972B4-8A7F-4C6D-A69C-8AF5D81B7014}"/>
-              </a:ext>
-            </a:extLst>
-          </p:cNvPr>
-          <p:cNvSpPr>
-            <a:spLocks xmlns:a="http://schemas.openxmlformats.org/drawingml/2006/main" noGrp="1"/>
-          </p:cNvSpPr>
-          <p:nvPr/>
-        </p:nvSpPr>
-        <p:spPr>
-          <a:xfrm xmlns:a="http://schemas.openxmlformats.org/drawingml/2006/main">
-            <a:off x="1000125" y="2247900"/>
-            <a:ext cx="476250" cy="476250"/>
-          </a:xfrm>
-          <a:prstGeom xmlns:a="http://schemas.openxmlformats.org/drawingml/2006/main" prst="ellipse">
+                <a16:creationId xmlns:a16="http://schemas.microsoft.com/office/drawing/2014/main" id="{EFEC3D83-A2F3-4D62-8795-D9039C753A47}"/>
+              </a:ext>
+            </a:extLst>
+          </p:cNvPr>
+          <p:cNvSpPr>
+            <a:spLocks xmlns:a="http://schemas.openxmlformats.org/drawingml/2006/main" noGrp="1"/>
+          </p:cNvSpPr>
+          <p:nvPr/>
+        </p:nvSpPr>
+        <p:spPr>
+          <a:xfrm xmlns:a="http://schemas.openxmlformats.org/drawingml/2006/main">
+            <a:off x="971550" y="2124075"/>
+            <a:ext cx="38100" cy="3524250"/>
+          </a:xfrm>
+          <a:prstGeom xmlns:a="http://schemas.openxmlformats.org/drawingml/2006/main" prst="rect">
             <a:avLst/>
           </a:prstGeom>
           <a:solidFill xmlns:a="http://schemas.openxmlformats.org/drawingml/2006/main">
-            <a:srgbClr val="18324A"/>
+            <a:srgbClr val="2C6E73"/>
           </a:solidFill>
           <a:ln xmlns:a="http://schemas.openxmlformats.org/drawingml/2006/main" w="0">
-            <a:noFill/>
+            <a:solidFill>
+              <a:srgbClr val="2C6E73"/>
+            </a:solidFill>
           </a:ln>
         </p:spPr>
       </p:sp>
@@ -8297,19 +8299,19 @@
           <p:cNvPr id="12" name="">
             <a:extLst xmlns:a="http://schemas.openxmlformats.org/drawingml/2006/main">
               <a:ext uri="{FF2B5EF4-FFF2-40B4-BE49-F238E27FC236}">
-                <a16:creationId xmlns:a16="http://schemas.microsoft.com/office/drawing/2014/main" id="{AF446732-6EC3-43E3-A1E2-821AD0697EA4}"/>
-              </a:ext>
-            </a:extLst>
-          </p:cNvPr>
-          <p:cNvSpPr>
-            <a:spLocks xmlns:a="http://schemas.openxmlformats.org/drawingml/2006/main" noGrp="1"/>
-          </p:cNvSpPr>
-          <p:nvPr/>
-        </p:nvSpPr>
-        <p:spPr>
-          <a:xfrm xmlns:a="http://schemas.openxmlformats.org/drawingml/2006/main">
-            <a:off x="1000125" y="2276475"/>
-            <a:ext cx="476250" cy="419100"/>
+                <a16:creationId xmlns:a16="http://schemas.microsoft.com/office/drawing/2014/main" id="{4B6797CD-9BB0-42C4-B9FE-57AAE2A4A4CB}"/>
+              </a:ext>
+            </a:extLst>
+          </p:cNvPr>
+          <p:cNvSpPr>
+            <a:spLocks xmlns:a="http://schemas.openxmlformats.org/drawingml/2006/main" noGrp="1"/>
+          </p:cNvSpPr>
+          <p:nvPr/>
+        </p:nvSpPr>
+        <p:spPr>
+          <a:xfrm xmlns:a="http://schemas.openxmlformats.org/drawingml/2006/main">
+            <a:off x="1162050" y="2200275"/>
+            <a:ext cx="400050" cy="400050"/>
           </a:xfrm>
           <a:prstGeom xmlns:a="http://schemas.openxmlformats.org/drawingml/2006/main" prst="rect">
             <a:avLst/>
@@ -8326,9 +8328,9 @@
           <a:lstStyle xmlns:a="http://schemas.openxmlformats.org/drawingml/2006/main"/>
           <a:p xmlns:a="http://schemas.openxmlformats.org/drawingml/2006/main">
             <a:pPr algn="ctr">
-              <a:defRPr sz="1350" b="1">
-                <a:solidFill>
-                  <a:srgbClr val="FFFFFF"/>
+              <a:defRPr sz="1125" b="1">
+                <a:solidFill>
+                  <a:srgbClr val="2C6E73"/>
                 </a:solidFill>
                 <a:latin typeface="Arial"/>
                 <a:ea typeface="Arial"/>
@@ -8336,9 +8338,9 @@
               </a:defRPr>
             </a:pPr>
             <a:r>
-              <a:rPr sz="1350" b="1">
-                <a:solidFill>
-                  <a:srgbClr val="FFFFFF"/>
+              <a:rPr sz="1125" b="1">
+                <a:solidFill>
+                  <a:srgbClr val="2C6E73"/>
                 </a:solidFill>
                 <a:latin typeface="Arial"/>
                 <a:ea typeface="Arial"/>
@@ -8354,19 +8356,19 @@
           <p:cNvPr id="13" name="">
             <a:extLst xmlns:a="http://schemas.openxmlformats.org/drawingml/2006/main">
               <a:ext uri="{FF2B5EF4-FFF2-40B4-BE49-F238E27FC236}">
-                <a16:creationId xmlns:a16="http://schemas.microsoft.com/office/drawing/2014/main" id="{BC6BEAA8-7EDC-4D5F-91DD-0216AB749702}"/>
-              </a:ext>
-            </a:extLst>
-          </p:cNvPr>
-          <p:cNvSpPr>
-            <a:spLocks xmlns:a="http://schemas.openxmlformats.org/drawingml/2006/main" noGrp="1"/>
-          </p:cNvSpPr>
-          <p:nvPr/>
-        </p:nvSpPr>
-        <p:spPr>
-          <a:xfrm xmlns:a="http://schemas.openxmlformats.org/drawingml/2006/main">
-            <a:off x="1714500" y="2181225"/>
-            <a:ext cx="9429750" cy="609600"/>
+                <a16:creationId xmlns:a16="http://schemas.microsoft.com/office/drawing/2014/main" id="{53D4EC93-CA3F-4FCD-941D-9E1F8C32ED56}"/>
+              </a:ext>
+            </a:extLst>
+          </p:cNvPr>
+          <p:cNvSpPr>
+            <a:spLocks xmlns:a="http://schemas.openxmlformats.org/drawingml/2006/main" noGrp="1"/>
+          </p:cNvSpPr>
+          <p:nvPr/>
+        </p:nvSpPr>
+        <p:spPr>
+          <a:xfrm xmlns:a="http://schemas.openxmlformats.org/drawingml/2006/main">
+            <a:off x="1714500" y="2114550"/>
+            <a:ext cx="9525000" cy="809625"/>
           </a:xfrm>
           <a:prstGeom xmlns:a="http://schemas.openxmlformats.org/drawingml/2006/main" prst="rect">
             <a:avLst/>
@@ -8383,7 +8385,7 @@
           <a:lstStyle xmlns:a="http://schemas.openxmlformats.org/drawingml/2006/main"/>
           <a:p xmlns:a="http://schemas.openxmlformats.org/drawingml/2006/main">
             <a:pPr algn="l">
-              <a:defRPr sz="1500" b="0">
+              <a:defRPr sz="1725" b="0">
                 <a:solidFill>
                   <a:srgbClr val="17253A"/>
                 </a:solidFill>
@@ -8393,7 +8395,7 @@
               </a:defRPr>
             </a:pPr>
             <a:r>
-              <a:rPr sz="1500" b="0">
+              <a:rPr sz="1725" b="0">
                 <a:solidFill>
                   <a:srgbClr val="17253A"/>
                 </a:solidFill>
@@ -8401,7 +8403,7 @@
                 <a:ea typeface="Arial"/>
                 <a:cs typeface="Arial"/>
               </a:rPr>
-              <a:t>Identify the structure: Represent the fraction as equal parts or use an equivalent multiplication.</a:t>
+              <a:t>5/6 ÷ 3</a:t>
             </a:r>
           </a:p>
         </p:txBody>
@@ -8411,28 +8413,30 @@
           <p:cNvPr id="14" name="">
             <a:extLst xmlns:a="http://schemas.openxmlformats.org/drawingml/2006/main">
               <a:ext uri="{FF2B5EF4-FFF2-40B4-BE49-F238E27FC236}">
-                <a16:creationId xmlns:a16="http://schemas.microsoft.com/office/drawing/2014/main" id="{BF43813F-5366-4D0A-807D-B95F631DB1FC}"/>
-              </a:ext>
-            </a:extLst>
-          </p:cNvPr>
-          <p:cNvSpPr>
-            <a:spLocks xmlns:a="http://schemas.openxmlformats.org/drawingml/2006/main" noGrp="1"/>
-          </p:cNvSpPr>
-          <p:nvPr/>
-        </p:nvSpPr>
-        <p:spPr>
-          <a:xfrm xmlns:a="http://schemas.openxmlformats.org/drawingml/2006/main">
-            <a:off x="1000125" y="2990850"/>
-            <a:ext cx="476250" cy="476250"/>
-          </a:xfrm>
-          <a:prstGeom xmlns:a="http://schemas.openxmlformats.org/drawingml/2006/main" prst="ellipse">
+                <a16:creationId xmlns:a16="http://schemas.microsoft.com/office/drawing/2014/main" id="{7CA3F478-D471-4F4D-B199-072B5EF8E36F}"/>
+              </a:ext>
+            </a:extLst>
+          </p:cNvPr>
+          <p:cNvSpPr>
+            <a:spLocks xmlns:a="http://schemas.openxmlformats.org/drawingml/2006/main" noGrp="1"/>
+          </p:cNvSpPr>
+          <p:nvPr/>
+        </p:nvSpPr>
+        <p:spPr>
+          <a:xfrm xmlns:a="http://schemas.openxmlformats.org/drawingml/2006/main">
+            <a:off x="1714500" y="2943225"/>
+            <a:ext cx="9334500" cy="9525"/>
+          </a:xfrm>
+          <a:prstGeom xmlns:a="http://schemas.openxmlformats.org/drawingml/2006/main" prst="rect">
             <a:avLst/>
           </a:prstGeom>
           <a:solidFill xmlns:a="http://schemas.openxmlformats.org/drawingml/2006/main">
-            <a:srgbClr val="2C6E73"/>
+            <a:srgbClr val="D9E0E6"/>
           </a:solidFill>
           <a:ln xmlns:a="http://schemas.openxmlformats.org/drawingml/2006/main" w="0">
-            <a:noFill/>
+            <a:solidFill>
+              <a:srgbClr val="D9E0E6"/>
+            </a:solidFill>
           </a:ln>
         </p:spPr>
       </p:sp>
@@ -8441,19 +8445,19 @@
           <p:cNvPr id="15" name="">
             <a:extLst xmlns:a="http://schemas.openxmlformats.org/drawingml/2006/main">
               <a:ext uri="{FF2B5EF4-FFF2-40B4-BE49-F238E27FC236}">
-                <a16:creationId xmlns:a16="http://schemas.microsoft.com/office/drawing/2014/main" id="{3214A544-ACBA-4A2E-80FB-C04B59DB7C97}"/>
-              </a:ext>
-            </a:extLst>
-          </p:cNvPr>
-          <p:cNvSpPr>
-            <a:spLocks xmlns:a="http://schemas.openxmlformats.org/drawingml/2006/main" noGrp="1"/>
-          </p:cNvSpPr>
-          <p:nvPr/>
-        </p:nvSpPr>
-        <p:spPr>
-          <a:xfrm xmlns:a="http://schemas.openxmlformats.org/drawingml/2006/main">
-            <a:off x="1000125" y="3019425"/>
-            <a:ext cx="476250" cy="419100"/>
+                <a16:creationId xmlns:a16="http://schemas.microsoft.com/office/drawing/2014/main" id="{897BF8E4-60B4-4774-976B-3B58271C690C}"/>
+              </a:ext>
+            </a:extLst>
+          </p:cNvPr>
+          <p:cNvSpPr>
+            <a:spLocks xmlns:a="http://schemas.openxmlformats.org/drawingml/2006/main" noGrp="1"/>
+          </p:cNvSpPr>
+          <p:nvPr/>
+        </p:nvSpPr>
+        <p:spPr>
+          <a:xfrm xmlns:a="http://schemas.openxmlformats.org/drawingml/2006/main">
+            <a:off x="1162050" y="3076575"/>
+            <a:ext cx="400050" cy="400050"/>
           </a:xfrm>
           <a:prstGeom xmlns:a="http://schemas.openxmlformats.org/drawingml/2006/main" prst="rect">
             <a:avLst/>
@@ -8470,9 +8474,9 @@
           <a:lstStyle xmlns:a="http://schemas.openxmlformats.org/drawingml/2006/main"/>
           <a:p xmlns:a="http://schemas.openxmlformats.org/drawingml/2006/main">
             <a:pPr algn="ctr">
-              <a:defRPr sz="1350" b="1">
-                <a:solidFill>
-                  <a:srgbClr val="FFFFFF"/>
+              <a:defRPr sz="1125" b="1">
+                <a:solidFill>
+                  <a:srgbClr val="2C6E73"/>
                 </a:solidFill>
                 <a:latin typeface="Arial"/>
                 <a:ea typeface="Arial"/>
@@ -8480,9 +8484,9 @@
               </a:defRPr>
             </a:pPr>
             <a:r>
-              <a:rPr sz="1350" b="1">
-                <a:solidFill>
-                  <a:srgbClr val="FFFFFF"/>
+              <a:rPr sz="1125" b="1">
+                <a:solidFill>
+                  <a:srgbClr val="2C6E73"/>
                 </a:solidFill>
                 <a:latin typeface="Arial"/>
                 <a:ea typeface="Arial"/>
@@ -8498,19 +8502,19 @@
           <p:cNvPr id="16" name="">
             <a:extLst xmlns:a="http://schemas.openxmlformats.org/drawingml/2006/main">
               <a:ext uri="{FF2B5EF4-FFF2-40B4-BE49-F238E27FC236}">
-                <a16:creationId xmlns:a16="http://schemas.microsoft.com/office/drawing/2014/main" id="{EDA7E274-7EDF-442B-AB14-89B21617E7A6}"/>
-              </a:ext>
-            </a:extLst>
-          </p:cNvPr>
-          <p:cNvSpPr>
-            <a:spLocks xmlns:a="http://schemas.openxmlformats.org/drawingml/2006/main" noGrp="1"/>
-          </p:cNvSpPr>
-          <p:nvPr/>
-        </p:nvSpPr>
-        <p:spPr>
-          <a:xfrm xmlns:a="http://schemas.openxmlformats.org/drawingml/2006/main">
-            <a:off x="1714500" y="2924175"/>
-            <a:ext cx="9429750" cy="609600"/>
+                <a16:creationId xmlns:a16="http://schemas.microsoft.com/office/drawing/2014/main" id="{42C6A264-3840-4FF0-8F5E-205190B8F4CB}"/>
+              </a:ext>
+            </a:extLst>
+          </p:cNvPr>
+          <p:cNvSpPr>
+            <a:spLocks xmlns:a="http://schemas.openxmlformats.org/drawingml/2006/main" noGrp="1"/>
+          </p:cNvSpPr>
+          <p:nvPr/>
+        </p:nvSpPr>
+        <p:spPr>
+          <a:xfrm xmlns:a="http://schemas.openxmlformats.org/drawingml/2006/main">
+            <a:off x="1714500" y="2990850"/>
+            <a:ext cx="9525000" cy="809625"/>
           </a:xfrm>
           <a:prstGeom xmlns:a="http://schemas.openxmlformats.org/drawingml/2006/main" prst="rect">
             <a:avLst/>
@@ -8527,7 +8531,7 @@
           <a:lstStyle xmlns:a="http://schemas.openxmlformats.org/drawingml/2006/main"/>
           <a:p xmlns:a="http://schemas.openxmlformats.org/drawingml/2006/main">
             <a:pPr algn="l">
-              <a:defRPr sz="1500" b="0">
+              <a:defRPr sz="1725" b="0">
                 <a:solidFill>
                   <a:srgbClr val="17253A"/>
                 </a:solidFill>
@@ -8537,7 +8541,7 @@
               </a:defRPr>
             </a:pPr>
             <a:r>
-              <a:rPr sz="1500" b="0">
+              <a:rPr sz="1725" b="0">
                 <a:solidFill>
                   <a:srgbClr val="17253A"/>
                 </a:solidFill>
@@ -8545,7 +8549,7 @@
                 <a:ea typeface="Arial"/>
                 <a:cs typeface="Arial"/>
               </a:rPr>
-              <a:t>Set up the method: Divide the numerator when possible or multiply the denominator by the whole number.</a:t>
+              <a:t>Dividing by 3 means multiply by 1/3</a:t>
             </a:r>
           </a:p>
         </p:txBody>
@@ -8555,28 +8559,30 @@
           <p:cNvPr id="17" name="">
             <a:extLst xmlns:a="http://schemas.openxmlformats.org/drawingml/2006/main">
               <a:ext uri="{FF2B5EF4-FFF2-40B4-BE49-F238E27FC236}">
-                <a16:creationId xmlns:a16="http://schemas.microsoft.com/office/drawing/2014/main" id="{4FA497A7-EC3A-4156-B020-7E468FE4A013}"/>
-              </a:ext>
-            </a:extLst>
-          </p:cNvPr>
-          <p:cNvSpPr>
-            <a:spLocks xmlns:a="http://schemas.openxmlformats.org/drawingml/2006/main" noGrp="1"/>
-          </p:cNvSpPr>
-          <p:nvPr/>
-        </p:nvSpPr>
-        <p:spPr>
-          <a:xfrm xmlns:a="http://schemas.openxmlformats.org/drawingml/2006/main">
-            <a:off x="1000125" y="3733800"/>
-            <a:ext cx="476250" cy="476250"/>
-          </a:xfrm>
-          <a:prstGeom xmlns:a="http://schemas.openxmlformats.org/drawingml/2006/main" prst="ellipse">
+                <a16:creationId xmlns:a16="http://schemas.microsoft.com/office/drawing/2014/main" id="{2A56A1F5-F2E3-4F69-BCB4-EA5492CF5BFE}"/>
+              </a:ext>
+            </a:extLst>
+          </p:cNvPr>
+          <p:cNvSpPr>
+            <a:spLocks xmlns:a="http://schemas.openxmlformats.org/drawingml/2006/main" noGrp="1"/>
+          </p:cNvSpPr>
+          <p:nvPr/>
+        </p:nvSpPr>
+        <p:spPr>
+          <a:xfrm xmlns:a="http://schemas.openxmlformats.org/drawingml/2006/main">
+            <a:off x="1714500" y="3819525"/>
+            <a:ext cx="9334500" cy="9525"/>
+          </a:xfrm>
+          <a:prstGeom xmlns:a="http://schemas.openxmlformats.org/drawingml/2006/main" prst="rect">
             <a:avLst/>
           </a:prstGeom>
           <a:solidFill xmlns:a="http://schemas.openxmlformats.org/drawingml/2006/main">
-            <a:srgbClr val="2C6E73"/>
+            <a:srgbClr val="D9E0E6"/>
           </a:solidFill>
           <a:ln xmlns:a="http://schemas.openxmlformats.org/drawingml/2006/main" w="0">
-            <a:noFill/>
+            <a:solidFill>
+              <a:srgbClr val="D9E0E6"/>
+            </a:solidFill>
           </a:ln>
         </p:spPr>
       </p:sp>
@@ -8585,19 +8591,19 @@
           <p:cNvPr id="18" name="">
             <a:extLst xmlns:a="http://schemas.openxmlformats.org/drawingml/2006/main">
               <a:ext uri="{FF2B5EF4-FFF2-40B4-BE49-F238E27FC236}">
-                <a16:creationId xmlns:a16="http://schemas.microsoft.com/office/drawing/2014/main" id="{F7A8B61E-7291-4616-B216-A01C43E99736}"/>
-              </a:ext>
-            </a:extLst>
-          </p:cNvPr>
-          <p:cNvSpPr>
-            <a:spLocks xmlns:a="http://schemas.openxmlformats.org/drawingml/2006/main" noGrp="1"/>
-          </p:cNvSpPr>
-          <p:nvPr/>
-        </p:nvSpPr>
-        <p:spPr>
-          <a:xfrm xmlns:a="http://schemas.openxmlformats.org/drawingml/2006/main">
-            <a:off x="1000125" y="3762375"/>
-            <a:ext cx="476250" cy="419100"/>
+                <a16:creationId xmlns:a16="http://schemas.microsoft.com/office/drawing/2014/main" id="{47D38DF5-4739-478A-B329-226ED5DE82B0}"/>
+              </a:ext>
+            </a:extLst>
+          </p:cNvPr>
+          <p:cNvSpPr>
+            <a:spLocks xmlns:a="http://schemas.openxmlformats.org/drawingml/2006/main" noGrp="1"/>
+          </p:cNvSpPr>
+          <p:nvPr/>
+        </p:nvSpPr>
+        <p:spPr>
+          <a:xfrm xmlns:a="http://schemas.openxmlformats.org/drawingml/2006/main">
+            <a:off x="1162050" y="3952875"/>
+            <a:ext cx="400050" cy="400050"/>
           </a:xfrm>
           <a:prstGeom xmlns:a="http://schemas.openxmlformats.org/drawingml/2006/main" prst="rect">
             <a:avLst/>
@@ -8614,9 +8620,9 @@
           <a:lstStyle xmlns:a="http://schemas.openxmlformats.org/drawingml/2006/main"/>
           <a:p xmlns:a="http://schemas.openxmlformats.org/drawingml/2006/main">
             <a:pPr algn="ctr">
-              <a:defRPr sz="1350" b="1">
-                <a:solidFill>
-                  <a:srgbClr val="FFFFFF"/>
+              <a:defRPr sz="1125" b="1">
+                <a:solidFill>
+                  <a:srgbClr val="2C6E73"/>
                 </a:solidFill>
                 <a:latin typeface="Arial"/>
                 <a:ea typeface="Arial"/>
@@ -8624,9 +8630,9 @@
               </a:defRPr>
             </a:pPr>
             <a:r>
-              <a:rPr sz="1350" b="1">
-                <a:solidFill>
-                  <a:srgbClr val="FFFFFF"/>
+              <a:rPr sz="1125" b="1">
+                <a:solidFill>
+                  <a:srgbClr val="2C6E73"/>
                 </a:solidFill>
                 <a:latin typeface="Arial"/>
                 <a:ea typeface="Arial"/>
@@ -8642,19 +8648,19 @@
           <p:cNvPr id="19" name="">
             <a:extLst xmlns:a="http://schemas.openxmlformats.org/drawingml/2006/main">
               <a:ext uri="{FF2B5EF4-FFF2-40B4-BE49-F238E27FC236}">
-                <a16:creationId xmlns:a16="http://schemas.microsoft.com/office/drawing/2014/main" id="{D41F5D67-35A9-45FE-A32A-7A8F051588E4}"/>
-              </a:ext>
-            </a:extLst>
-          </p:cNvPr>
-          <p:cNvSpPr>
-            <a:spLocks xmlns:a="http://schemas.openxmlformats.org/drawingml/2006/main" noGrp="1"/>
-          </p:cNvSpPr>
-          <p:nvPr/>
-        </p:nvSpPr>
-        <p:spPr>
-          <a:xfrm xmlns:a="http://schemas.openxmlformats.org/drawingml/2006/main">
-            <a:off x="1714500" y="3667125"/>
-            <a:ext cx="9429750" cy="609600"/>
+                <a16:creationId xmlns:a16="http://schemas.microsoft.com/office/drawing/2014/main" id="{51BBA0C2-481B-4BE1-B1E3-C224EC48356C}"/>
+              </a:ext>
+            </a:extLst>
+          </p:cNvPr>
+          <p:cNvSpPr>
+            <a:spLocks xmlns:a="http://schemas.openxmlformats.org/drawingml/2006/main" noGrp="1"/>
+          </p:cNvSpPr>
+          <p:nvPr/>
+        </p:nvSpPr>
+        <p:spPr>
+          <a:xfrm xmlns:a="http://schemas.openxmlformats.org/drawingml/2006/main">
+            <a:off x="1714500" y="3867150"/>
+            <a:ext cx="9525000" cy="809625"/>
           </a:xfrm>
           <a:prstGeom xmlns:a="http://schemas.openxmlformats.org/drawingml/2006/main" prst="rect">
             <a:avLst/>
@@ -8671,7 +8677,7 @@
           <a:lstStyle xmlns:a="http://schemas.openxmlformats.org/drawingml/2006/main"/>
           <a:p xmlns:a="http://schemas.openxmlformats.org/drawingml/2006/main">
             <a:pPr algn="l">
-              <a:defRPr sz="1500" b="0">
+              <a:defRPr sz="1725" b="0">
                 <a:solidFill>
                   <a:srgbClr val="17253A"/>
                 </a:solidFill>
@@ -8681,7 +8687,7 @@
               </a:defRPr>
             </a:pPr>
             <a:r>
-              <a:rPr sz="1500" b="0">
+              <a:rPr sz="1725" b="0">
                 <a:solidFill>
                   <a:srgbClr val="17253A"/>
                 </a:solidFill>
@@ -8689,7 +8695,7 @@
                 <a:ea typeface="Arial"/>
                 <a:cs typeface="Arial"/>
               </a:rPr>
-              <a:t>Complete the calculation: 5/18.</a:t>
+              <a:t>5/6 × 1/3</a:t>
             </a:r>
           </a:p>
         </p:txBody>
@@ -8699,28 +8705,30 @@
           <p:cNvPr id="20" name="">
             <a:extLst xmlns:a="http://schemas.openxmlformats.org/drawingml/2006/main">
               <a:ext uri="{FF2B5EF4-FFF2-40B4-BE49-F238E27FC236}">
-                <a16:creationId xmlns:a16="http://schemas.microsoft.com/office/drawing/2014/main" id="{F0EE88C8-31AD-4F97-9740-488FF826874C}"/>
-              </a:ext>
-            </a:extLst>
-          </p:cNvPr>
-          <p:cNvSpPr>
-            <a:spLocks xmlns:a="http://schemas.openxmlformats.org/drawingml/2006/main" noGrp="1"/>
-          </p:cNvSpPr>
-          <p:nvPr/>
-        </p:nvSpPr>
-        <p:spPr>
-          <a:xfrm xmlns:a="http://schemas.openxmlformats.org/drawingml/2006/main">
-            <a:off x="1000125" y="4476750"/>
-            <a:ext cx="476250" cy="476250"/>
-          </a:xfrm>
-          <a:prstGeom xmlns:a="http://schemas.openxmlformats.org/drawingml/2006/main" prst="ellipse">
+                <a16:creationId xmlns:a16="http://schemas.microsoft.com/office/drawing/2014/main" id="{393A02CA-BCC4-435A-B8F3-B795944091ED}"/>
+              </a:ext>
+            </a:extLst>
+          </p:cNvPr>
+          <p:cNvSpPr>
+            <a:spLocks xmlns:a="http://schemas.openxmlformats.org/drawingml/2006/main" noGrp="1"/>
+          </p:cNvSpPr>
+          <p:nvPr/>
+        </p:nvSpPr>
+        <p:spPr>
+          <a:xfrm xmlns:a="http://schemas.openxmlformats.org/drawingml/2006/main">
+            <a:off x="1714500" y="4695825"/>
+            <a:ext cx="9334500" cy="9525"/>
+          </a:xfrm>
+          <a:prstGeom xmlns:a="http://schemas.openxmlformats.org/drawingml/2006/main" prst="rect">
             <a:avLst/>
           </a:prstGeom>
           <a:solidFill xmlns:a="http://schemas.openxmlformats.org/drawingml/2006/main">
-            <a:srgbClr val="2C6E73"/>
+            <a:srgbClr val="D9E0E6"/>
           </a:solidFill>
           <a:ln xmlns:a="http://schemas.openxmlformats.org/drawingml/2006/main" w="0">
-            <a:noFill/>
+            <a:solidFill>
+              <a:srgbClr val="D9E0E6"/>
+            </a:solidFill>
           </a:ln>
         </p:spPr>
       </p:sp>
@@ -8729,19 +8737,19 @@
           <p:cNvPr id="21" name="">
             <a:extLst xmlns:a="http://schemas.openxmlformats.org/drawingml/2006/main">
               <a:ext uri="{FF2B5EF4-FFF2-40B4-BE49-F238E27FC236}">
-                <a16:creationId xmlns:a16="http://schemas.microsoft.com/office/drawing/2014/main" id="{EF23AD05-885D-4B26-90D9-716F475BD315}"/>
-              </a:ext>
-            </a:extLst>
-          </p:cNvPr>
-          <p:cNvSpPr>
-            <a:spLocks xmlns:a="http://schemas.openxmlformats.org/drawingml/2006/main" noGrp="1"/>
-          </p:cNvSpPr>
-          <p:nvPr/>
-        </p:nvSpPr>
-        <p:spPr>
-          <a:xfrm xmlns:a="http://schemas.openxmlformats.org/drawingml/2006/main">
-            <a:off x="1000125" y="4505325"/>
-            <a:ext cx="476250" cy="419100"/>
+                <a16:creationId xmlns:a16="http://schemas.microsoft.com/office/drawing/2014/main" id="{AA35970D-95A8-46E4-8437-17C49B62334E}"/>
+              </a:ext>
+            </a:extLst>
+          </p:cNvPr>
+          <p:cNvSpPr>
+            <a:spLocks xmlns:a="http://schemas.openxmlformats.org/drawingml/2006/main" noGrp="1"/>
+          </p:cNvSpPr>
+          <p:nvPr/>
+        </p:nvSpPr>
+        <p:spPr>
+          <a:xfrm xmlns:a="http://schemas.openxmlformats.org/drawingml/2006/main">
+            <a:off x="1162050" y="4829175"/>
+            <a:ext cx="400050" cy="400050"/>
           </a:xfrm>
           <a:prstGeom xmlns:a="http://schemas.openxmlformats.org/drawingml/2006/main" prst="rect">
             <a:avLst/>
@@ -8758,9 +8766,9 @@
           <a:lstStyle xmlns:a="http://schemas.openxmlformats.org/drawingml/2006/main"/>
           <a:p xmlns:a="http://schemas.openxmlformats.org/drawingml/2006/main">
             <a:pPr algn="ctr">
-              <a:defRPr sz="1350" b="1">
-                <a:solidFill>
-                  <a:srgbClr val="FFFFFF"/>
+              <a:defRPr sz="1125" b="1">
+                <a:solidFill>
+                  <a:srgbClr val="2F785D"/>
                 </a:solidFill>
                 <a:latin typeface="Arial"/>
                 <a:ea typeface="Arial"/>
@@ -8768,9 +8776,9 @@
               </a:defRPr>
             </a:pPr>
             <a:r>
-              <a:rPr sz="1350" b="1">
-                <a:solidFill>
-                  <a:srgbClr val="FFFFFF"/>
+              <a:rPr sz="1125" b="1">
+                <a:solidFill>
+                  <a:srgbClr val="2F785D"/>
                 </a:solidFill>
                 <a:latin typeface="Arial"/>
                 <a:ea typeface="Arial"/>
@@ -8786,19 +8794,19 @@
           <p:cNvPr id="22" name="">
             <a:extLst xmlns:a="http://schemas.openxmlformats.org/drawingml/2006/main">
               <a:ext uri="{FF2B5EF4-FFF2-40B4-BE49-F238E27FC236}">
-                <a16:creationId xmlns:a16="http://schemas.microsoft.com/office/drawing/2014/main" id="{FCF364AE-CECB-40AA-8ABE-4342732E7196}"/>
-              </a:ext>
-            </a:extLst>
-          </p:cNvPr>
-          <p:cNvSpPr>
-            <a:spLocks xmlns:a="http://schemas.openxmlformats.org/drawingml/2006/main" noGrp="1"/>
-          </p:cNvSpPr>
-          <p:nvPr/>
-        </p:nvSpPr>
-        <p:spPr>
-          <a:xfrm xmlns:a="http://schemas.openxmlformats.org/drawingml/2006/main">
-            <a:off x="1714500" y="4410075"/>
-            <a:ext cx="9429750" cy="609600"/>
+                <a16:creationId xmlns:a16="http://schemas.microsoft.com/office/drawing/2014/main" id="{57870B4D-DF5F-419A-8693-445310BF8715}"/>
+              </a:ext>
+            </a:extLst>
+          </p:cNvPr>
+          <p:cNvSpPr>
+            <a:spLocks xmlns:a="http://schemas.openxmlformats.org/drawingml/2006/main" noGrp="1"/>
+          </p:cNvSpPr>
+          <p:nvPr/>
+        </p:nvSpPr>
+        <p:spPr>
+          <a:xfrm xmlns:a="http://schemas.openxmlformats.org/drawingml/2006/main">
+            <a:off x="1714500" y="4743450"/>
+            <a:ext cx="9525000" cy="809625"/>
           </a:xfrm>
           <a:prstGeom xmlns:a="http://schemas.openxmlformats.org/drawingml/2006/main" prst="rect">
             <a:avLst/>
@@ -8815,7 +8823,7 @@
           <a:lstStyle xmlns:a="http://schemas.openxmlformats.org/drawingml/2006/main"/>
           <a:p xmlns:a="http://schemas.openxmlformats.org/drawingml/2006/main">
             <a:pPr algn="l">
-              <a:defRPr sz="1500" b="1">
+              <a:defRPr sz="1725" b="1">
                 <a:solidFill>
                   <a:srgbClr val="2F785D"/>
                 </a:solidFill>
@@ -8825,7 +8833,7 @@
               </a:defRPr>
             </a:pPr>
             <a:r>
-              <a:rPr sz="1500" b="1">
+              <a:rPr sz="1725" b="1">
                 <a:solidFill>
                   <a:srgbClr val="2F785D"/>
                 </a:solidFill>
@@ -8833,7 +8841,7 @@
                 <a:ea typeface="Arial"/>
                 <a:cs typeface="Arial"/>
               </a:rPr>
-              <a:t>Check the result: Simplify and check by multiplying back.</a:t>
+              <a:t>5/18</a:t>
             </a:r>
           </a:p>
         </p:txBody>
@@ -8841,7 +8849,7 @@
     </p:spTree>
     <p:extLst>
       <p:ext uri="{BB962C8B-B14F-4D97-AF65-F5344CB8AC3E}">
-        <p14:creationId xmlns:p14="http://schemas.microsoft.com/office/powerpoint/2010/main" val="619413042"/>
+        <p14:creationId xmlns:p14="http://schemas.microsoft.com/office/powerpoint/2010/main" val="406749156"/>
       </p:ext>
     </p:extLst>
   </p:cSld>
@@ -9134,7 +9142,7 @@
           <p:cNvPr id="15" name="">
             <a:extLst xmlns:a="http://schemas.openxmlformats.org/drawingml/2006/main">
               <a:ext uri="{FF2B5EF4-FFF2-40B4-BE49-F238E27FC236}">
-                <a16:creationId xmlns:a16="http://schemas.microsoft.com/office/drawing/2014/main" id="{FB929FB5-68A2-4ACF-AAAB-2EE227907921}"/>
+                <a16:creationId xmlns:a16="http://schemas.microsoft.com/office/drawing/2014/main" id="{5AFD26F7-25C3-444C-9475-F758C3BC6EDC}"/>
               </a:ext>
             </a:extLst>
           </p:cNvPr>
@@ -9166,7 +9174,7 @@
           <p:cNvPr id="2" name="">
             <a:extLst xmlns:a="http://schemas.openxmlformats.org/drawingml/2006/main">
               <a:ext uri="{FF2B5EF4-FFF2-40B4-BE49-F238E27FC236}">
-                <a16:creationId xmlns:a16="http://schemas.microsoft.com/office/drawing/2014/main" id="{5B36DE60-8A38-44C0-B72F-E5E60E7A664C}"/>
+                <a16:creationId xmlns:a16="http://schemas.microsoft.com/office/drawing/2014/main" id="{C8BE83C5-A20D-4D20-9D95-2F47E446AA2C}"/>
               </a:ext>
             </a:extLst>
           </p:cNvPr>
@@ -9223,7 +9231,7 @@
           <p:cNvPr id="3" name="">
             <a:extLst xmlns:a="http://schemas.openxmlformats.org/drawingml/2006/main">
               <a:ext uri="{FF2B5EF4-FFF2-40B4-BE49-F238E27FC236}">
-                <a16:creationId xmlns:a16="http://schemas.microsoft.com/office/drawing/2014/main" id="{5667A3DD-FD94-41C1-958D-8152C23904F7}"/>
+                <a16:creationId xmlns:a16="http://schemas.microsoft.com/office/drawing/2014/main" id="{F37D8249-0D1D-4D9A-AC68-13C74042F49B}"/>
               </a:ext>
             </a:extLst>
           </p:cNvPr>
@@ -9255,7 +9263,7 @@
           <p:cNvPr id="4" name="">
             <a:extLst xmlns:a="http://schemas.openxmlformats.org/drawingml/2006/main">
               <a:ext uri="{FF2B5EF4-FFF2-40B4-BE49-F238E27FC236}">
-                <a16:creationId xmlns:a16="http://schemas.microsoft.com/office/drawing/2014/main" id="{0CD5ECEE-93AE-4896-BFF3-6F9BEC7843EC}"/>
+                <a16:creationId xmlns:a16="http://schemas.microsoft.com/office/drawing/2014/main" id="{7E75E708-AC4F-4ACB-9570-73DA9E56B3E3}"/>
               </a:ext>
             </a:extLst>
           </p:cNvPr>
@@ -9312,7 +9320,7 @@
           <p:cNvPr id="5" name="">
             <a:extLst xmlns:a="http://schemas.openxmlformats.org/drawingml/2006/main">
               <a:ext uri="{FF2B5EF4-FFF2-40B4-BE49-F238E27FC236}">
-                <a16:creationId xmlns:a16="http://schemas.microsoft.com/office/drawing/2014/main" id="{11063734-E5D3-4BC3-949D-13BFCA4C8E92}"/>
+                <a16:creationId xmlns:a16="http://schemas.microsoft.com/office/drawing/2014/main" id="{620448A0-2D15-4025-82E5-974F6B20EB86}"/>
               </a:ext>
             </a:extLst>
           </p:cNvPr>
@@ -9369,7 +9377,7 @@
           <p:cNvPr id="6" name="">
             <a:extLst xmlns:a="http://schemas.openxmlformats.org/drawingml/2006/main">
               <a:ext uri="{FF2B5EF4-FFF2-40B4-BE49-F238E27FC236}">
-                <a16:creationId xmlns:a16="http://schemas.microsoft.com/office/drawing/2014/main" id="{0A940447-ACB3-4590-BB5D-84739E6583F7}"/>
+                <a16:creationId xmlns:a16="http://schemas.microsoft.com/office/drawing/2014/main" id="{ED7268DA-13CF-41CA-9C1D-6C25CDB5F339}"/>
               </a:ext>
             </a:extLst>
           </p:cNvPr>
@@ -9426,7 +9434,7 @@
           <p:cNvPr id="7" name="">
             <a:extLst xmlns:a="http://schemas.openxmlformats.org/drawingml/2006/main">
               <a:ext uri="{FF2B5EF4-FFF2-40B4-BE49-F238E27FC236}">
-                <a16:creationId xmlns:a16="http://schemas.microsoft.com/office/drawing/2014/main" id="{8ECCC517-5E10-472F-9952-426D0016E59F}"/>
+                <a16:creationId xmlns:a16="http://schemas.microsoft.com/office/drawing/2014/main" id="{F5DD73BB-77F2-4B47-8DCC-8CB75257CD02}"/>
               </a:ext>
             </a:extLst>
           </p:cNvPr>
@@ -9458,7 +9466,7 @@
           <p:cNvPr id="8" name="">
             <a:extLst xmlns:a="http://schemas.openxmlformats.org/drawingml/2006/main">
               <a:ext uri="{FF2B5EF4-FFF2-40B4-BE49-F238E27FC236}">
-                <a16:creationId xmlns:a16="http://schemas.microsoft.com/office/drawing/2014/main" id="{5365F715-6BD3-4393-BBD9-6FB30F56001F}"/>
+                <a16:creationId xmlns:a16="http://schemas.microsoft.com/office/drawing/2014/main" id="{F6009534-20AE-4193-AE59-4717E5BA2CBD}"/>
               </a:ext>
             </a:extLst>
           </p:cNvPr>
@@ -9515,7 +9523,7 @@
           <p:cNvPr id="9" name="">
             <a:extLst xmlns:a="http://schemas.openxmlformats.org/drawingml/2006/main">
               <a:ext uri="{FF2B5EF4-FFF2-40B4-BE49-F238E27FC236}">
-                <a16:creationId xmlns:a16="http://schemas.microsoft.com/office/drawing/2014/main" id="{E85A920B-1D25-4B53-99A1-F52A67D5ABFB}"/>
+                <a16:creationId xmlns:a16="http://schemas.microsoft.com/office/drawing/2014/main" id="{E13EB30B-36E5-47FB-8CD9-557BAA6A70C7}"/>
               </a:ext>
             </a:extLst>
           </p:cNvPr>
@@ -9572,7 +9580,7 @@
           <p:cNvPr id="10" name="">
             <a:extLst xmlns:a="http://schemas.openxmlformats.org/drawingml/2006/main">
               <a:ext uri="{FF2B5EF4-FFF2-40B4-BE49-F238E27FC236}">
-                <a16:creationId xmlns:a16="http://schemas.microsoft.com/office/drawing/2014/main" id="{C53F7EE1-F494-4531-84B9-B1C1FB7C3B56}"/>
+                <a16:creationId xmlns:a16="http://schemas.microsoft.com/office/drawing/2014/main" id="{EEEB0B68-3E25-4761-96BB-5C785E96774E}"/>
               </a:ext>
             </a:extLst>
           </p:cNvPr>
@@ -9629,7 +9637,7 @@
           <p:cNvPr id="11" name="">
             <a:extLst xmlns:a="http://schemas.openxmlformats.org/drawingml/2006/main">
               <a:ext uri="{FF2B5EF4-FFF2-40B4-BE49-F238E27FC236}">
-                <a16:creationId xmlns:a16="http://schemas.microsoft.com/office/drawing/2014/main" id="{050C94DE-000B-4E7E-A98D-491C26FA790D}"/>
+                <a16:creationId xmlns:a16="http://schemas.microsoft.com/office/drawing/2014/main" id="{940405E6-20FA-4A3D-83F3-6BD9A357DA4C}"/>
               </a:ext>
             </a:extLst>
           </p:cNvPr>
@@ -9686,7 +9694,7 @@
           <p:cNvPr id="12" name="">
             <a:extLst xmlns:a="http://schemas.openxmlformats.org/drawingml/2006/main">
               <a:ext uri="{FF2B5EF4-FFF2-40B4-BE49-F238E27FC236}">
-                <a16:creationId xmlns:a16="http://schemas.microsoft.com/office/drawing/2014/main" id="{A31BB1F1-98F6-4978-9569-3BA1A1F162CD}"/>
+                <a16:creationId xmlns:a16="http://schemas.microsoft.com/office/drawing/2014/main" id="{83499C7C-7269-491D-932E-0B83EE5C4682}"/>
               </a:ext>
             </a:extLst>
           </p:cNvPr>
@@ -9718,7 +9726,7 @@
           <p:cNvPr id="13" name="">
             <a:extLst xmlns:a="http://schemas.openxmlformats.org/drawingml/2006/main">
               <a:ext uri="{FF2B5EF4-FFF2-40B4-BE49-F238E27FC236}">
-                <a16:creationId xmlns:a16="http://schemas.microsoft.com/office/drawing/2014/main" id="{D795F59F-BD72-4563-BD6A-6493CEB4D507}"/>
+                <a16:creationId xmlns:a16="http://schemas.microsoft.com/office/drawing/2014/main" id="{083EF083-04AA-4DCF-8A4A-F3CD577829A4}"/>
               </a:ext>
             </a:extLst>
           </p:cNvPr>
@@ -9775,7 +9783,7 @@
           <p:cNvPr id="14" name="">
             <a:extLst xmlns:a="http://schemas.openxmlformats.org/drawingml/2006/main">
               <a:ext uri="{FF2B5EF4-FFF2-40B4-BE49-F238E27FC236}">
-                <a16:creationId xmlns:a16="http://schemas.microsoft.com/office/drawing/2014/main" id="{65839301-ACDE-446B-A380-A4B7ECF1A20A}"/>
+                <a16:creationId xmlns:a16="http://schemas.microsoft.com/office/drawing/2014/main" id="{1AA125C6-574B-4C3B-894E-CD89DE4A6D33}"/>
               </a:ext>
             </a:extLst>
           </p:cNvPr>
@@ -9830,7 +9838,7 @@
     </p:spTree>
     <p:extLst>
       <p:ext uri="{BB962C8B-B14F-4D97-AF65-F5344CB8AC3E}">
-        <p14:creationId xmlns:p14="http://schemas.microsoft.com/office/powerpoint/2010/main" val="1909289279"/>
+        <p14:creationId xmlns:p14="http://schemas.microsoft.com/office/powerpoint/2010/main" val="766151486"/>
       </p:ext>
     </p:extLst>
   </p:cSld>
@@ -10031,7 +10039,7 @@
           <p:cNvPr id="16" name="">
             <a:extLst xmlns:a="http://schemas.openxmlformats.org/drawingml/2006/main">
               <a:ext uri="{FF2B5EF4-FFF2-40B4-BE49-F238E27FC236}">
-                <a16:creationId xmlns:a16="http://schemas.microsoft.com/office/drawing/2014/main" id="{2ABFD19C-3ECD-47D7-B569-E2E960E28D57}"/>
+                <a16:creationId xmlns:a16="http://schemas.microsoft.com/office/drawing/2014/main" id="{736463D5-9947-4F87-880B-7A26F4E76163}"/>
               </a:ext>
             </a:extLst>
           </p:cNvPr>
@@ -10063,7 +10071,7 @@
           <p:cNvPr id="2" name="">
             <a:extLst xmlns:a="http://schemas.openxmlformats.org/drawingml/2006/main">
               <a:ext uri="{FF2B5EF4-FFF2-40B4-BE49-F238E27FC236}">
-                <a16:creationId xmlns:a16="http://schemas.microsoft.com/office/drawing/2014/main" id="{1B809196-4021-4B50-BE35-DE9454AFC391}"/>
+                <a16:creationId xmlns:a16="http://schemas.microsoft.com/office/drawing/2014/main" id="{54D131EC-1E03-4B6C-9D1E-2F442DA51870}"/>
               </a:ext>
             </a:extLst>
           </p:cNvPr>
@@ -10120,7 +10128,7 @@
           <p:cNvPr id="3" name="">
             <a:extLst xmlns:a="http://schemas.openxmlformats.org/drawingml/2006/main">
               <a:ext uri="{FF2B5EF4-FFF2-40B4-BE49-F238E27FC236}">
-                <a16:creationId xmlns:a16="http://schemas.microsoft.com/office/drawing/2014/main" id="{857EB547-19F0-4C15-9F30-44325A721B81}"/>
+                <a16:creationId xmlns:a16="http://schemas.microsoft.com/office/drawing/2014/main" id="{6861997F-03DF-4CF2-9B64-D145FFFF6057}"/>
               </a:ext>
             </a:extLst>
           </p:cNvPr>
@@ -10152,7 +10160,7 @@
           <p:cNvPr id="4" name="">
             <a:extLst xmlns:a="http://schemas.openxmlformats.org/drawingml/2006/main">
               <a:ext uri="{FF2B5EF4-FFF2-40B4-BE49-F238E27FC236}">
-                <a16:creationId xmlns:a16="http://schemas.microsoft.com/office/drawing/2014/main" id="{37C75365-FB6D-4975-9A83-80FAE566B4DC}"/>
+                <a16:creationId xmlns:a16="http://schemas.microsoft.com/office/drawing/2014/main" id="{E2D2471C-740B-45E2-A450-B78817F55F4E}"/>
               </a:ext>
             </a:extLst>
           </p:cNvPr>
@@ -10209,7 +10217,7 @@
           <p:cNvPr id="5" name="">
             <a:extLst xmlns:a="http://schemas.openxmlformats.org/drawingml/2006/main">
               <a:ext uri="{FF2B5EF4-FFF2-40B4-BE49-F238E27FC236}">
-                <a16:creationId xmlns:a16="http://schemas.microsoft.com/office/drawing/2014/main" id="{27B54129-4A12-4F4F-9DA6-7CE3AEAF5489}"/>
+                <a16:creationId xmlns:a16="http://schemas.microsoft.com/office/drawing/2014/main" id="{AE7DE516-B8D4-4513-939D-ACC8D067968C}"/>
               </a:ext>
             </a:extLst>
           </p:cNvPr>
@@ -10266,7 +10274,7 @@
           <p:cNvPr id="6" name="">
             <a:extLst xmlns:a="http://schemas.openxmlformats.org/drawingml/2006/main">
               <a:ext uri="{FF2B5EF4-FFF2-40B4-BE49-F238E27FC236}">
-                <a16:creationId xmlns:a16="http://schemas.microsoft.com/office/drawing/2014/main" id="{2502DBC1-35C0-49E1-8D33-8DEBBF26F6D8}"/>
+                <a16:creationId xmlns:a16="http://schemas.microsoft.com/office/drawing/2014/main" id="{ABBB84E6-4027-45AE-A002-A970DE122B92}"/>
               </a:ext>
             </a:extLst>
           </p:cNvPr>
@@ -10323,7 +10331,7 @@
           <p:cNvPr id="7" name="">
             <a:extLst xmlns:a="http://schemas.openxmlformats.org/drawingml/2006/main">
               <a:ext uri="{FF2B5EF4-FFF2-40B4-BE49-F238E27FC236}">
-                <a16:creationId xmlns:a16="http://schemas.microsoft.com/office/drawing/2014/main" id="{4439EA88-BB2F-4495-B0F5-F0DE61EBED35}"/>
+                <a16:creationId xmlns:a16="http://schemas.microsoft.com/office/drawing/2014/main" id="{AAC3A585-FA71-4A25-8541-432D8588EC40}"/>
               </a:ext>
             </a:extLst>
           </p:cNvPr>
@@ -10355,7 +10363,7 @@
           <p:cNvPr id="8" name="">
             <a:extLst xmlns:a="http://schemas.openxmlformats.org/drawingml/2006/main">
               <a:ext uri="{FF2B5EF4-FFF2-40B4-BE49-F238E27FC236}">
-                <a16:creationId xmlns:a16="http://schemas.microsoft.com/office/drawing/2014/main" id="{0150A883-D9EA-4D6C-ABE7-FB80065D7847}"/>
+                <a16:creationId xmlns:a16="http://schemas.microsoft.com/office/drawing/2014/main" id="{7089F277-7F69-4E9F-9C7F-BF444EAA6D16}"/>
               </a:ext>
             </a:extLst>
           </p:cNvPr>
@@ -10412,7 +10420,7 @@
           <p:cNvPr id="9" name="">
             <a:extLst xmlns:a="http://schemas.openxmlformats.org/drawingml/2006/main">
               <a:ext uri="{FF2B5EF4-FFF2-40B4-BE49-F238E27FC236}">
-                <a16:creationId xmlns:a16="http://schemas.microsoft.com/office/drawing/2014/main" id="{D7C40B86-2590-41ED-9E87-444784399365}"/>
+                <a16:creationId xmlns:a16="http://schemas.microsoft.com/office/drawing/2014/main" id="{8B4A74FC-84B6-4B9F-BA1C-1AC78916E2E3}"/>
               </a:ext>
             </a:extLst>
           </p:cNvPr>
@@ -10469,7 +10477,7 @@
           <p:cNvPr id="10" name="">
             <a:extLst xmlns:a="http://schemas.openxmlformats.org/drawingml/2006/main">
               <a:ext uri="{FF2B5EF4-FFF2-40B4-BE49-F238E27FC236}">
-                <a16:creationId xmlns:a16="http://schemas.microsoft.com/office/drawing/2014/main" id="{851CA869-381D-441E-80AC-3A344A8BF4BB}"/>
+                <a16:creationId xmlns:a16="http://schemas.microsoft.com/office/drawing/2014/main" id="{44E21BDF-0E69-4002-BA4E-1D23F83545F3}"/>
               </a:ext>
             </a:extLst>
           </p:cNvPr>
@@ -10526,7 +10534,7 @@
           <p:cNvPr id="11" name="">
             <a:extLst xmlns:a="http://schemas.openxmlformats.org/drawingml/2006/main">
               <a:ext uri="{FF2B5EF4-FFF2-40B4-BE49-F238E27FC236}">
-                <a16:creationId xmlns:a16="http://schemas.microsoft.com/office/drawing/2014/main" id="{85A8FB13-91F5-46C6-8E1E-2D1651756444}"/>
+                <a16:creationId xmlns:a16="http://schemas.microsoft.com/office/drawing/2014/main" id="{44341938-9EB3-474F-A248-D04E78621D20}"/>
               </a:ext>
             </a:extLst>
           </p:cNvPr>
@@ -10583,7 +10591,7 @@
           <p:cNvPr id="12" name="">
             <a:extLst xmlns:a="http://schemas.openxmlformats.org/drawingml/2006/main">
               <a:ext uri="{FF2B5EF4-FFF2-40B4-BE49-F238E27FC236}">
-                <a16:creationId xmlns:a16="http://schemas.microsoft.com/office/drawing/2014/main" id="{BBCD2C41-5DA6-407B-BB16-EEB587CAA244}"/>
+                <a16:creationId xmlns:a16="http://schemas.microsoft.com/office/drawing/2014/main" id="{2CA71AF4-A51D-4455-83FF-6D7825FB6D64}"/>
               </a:ext>
             </a:extLst>
           </p:cNvPr>
@@ -10640,7 +10648,7 @@
           <p:cNvPr id="13" name="">
             <a:extLst xmlns:a="http://schemas.openxmlformats.org/drawingml/2006/main">
               <a:ext uri="{FF2B5EF4-FFF2-40B4-BE49-F238E27FC236}">
-                <a16:creationId xmlns:a16="http://schemas.microsoft.com/office/drawing/2014/main" id="{52374E51-946A-41A8-AD27-8875FF4A47C7}"/>
+                <a16:creationId xmlns:a16="http://schemas.microsoft.com/office/drawing/2014/main" id="{C48332BE-B7EF-4746-A6C0-BC4E7735B476}"/>
               </a:ext>
             </a:extLst>
           </p:cNvPr>
@@ -10697,7 +10705,7 @@
           <p:cNvPr id="14" name="">
             <a:extLst xmlns:a="http://schemas.openxmlformats.org/drawingml/2006/main">
               <a:ext uri="{FF2B5EF4-FFF2-40B4-BE49-F238E27FC236}">
-                <a16:creationId xmlns:a16="http://schemas.microsoft.com/office/drawing/2014/main" id="{7B3A8202-1C07-47F6-A764-6450D0F40B70}"/>
+                <a16:creationId xmlns:a16="http://schemas.microsoft.com/office/drawing/2014/main" id="{4EFDB936-649F-4EBA-A3BD-55CD797C3838}"/>
               </a:ext>
             </a:extLst>
           </p:cNvPr>
@@ -10754,7 +10762,7 @@
           <p:cNvPr id="15" name="">
             <a:extLst xmlns:a="http://schemas.openxmlformats.org/drawingml/2006/main">
               <a:ext uri="{FF2B5EF4-FFF2-40B4-BE49-F238E27FC236}">
-                <a16:creationId xmlns:a16="http://schemas.microsoft.com/office/drawing/2014/main" id="{F7F86E20-5EC7-4B8D-85CC-EB770D702662}"/>
+                <a16:creationId xmlns:a16="http://schemas.microsoft.com/office/drawing/2014/main" id="{4043834A-7C90-4671-9663-D49EEB3B6111}"/>
               </a:ext>
             </a:extLst>
           </p:cNvPr>
@@ -10809,7 +10817,7 @@
     </p:spTree>
     <p:extLst>
       <p:ext uri="{BB962C8B-B14F-4D97-AF65-F5344CB8AC3E}">
-        <p14:creationId xmlns:p14="http://schemas.microsoft.com/office/powerpoint/2010/main" val="849561806"/>
+        <p14:creationId xmlns:p14="http://schemas.microsoft.com/office/powerpoint/2010/main" val="305911375"/>
       </p:ext>
     </p:extLst>
   </p:cSld>
@@ -10964,7 +10972,7 @@
           <p:cNvPr id="16" name="">
             <a:extLst xmlns:a="http://schemas.openxmlformats.org/drawingml/2006/main">
               <a:ext uri="{FF2B5EF4-FFF2-40B4-BE49-F238E27FC236}">
-                <a16:creationId xmlns:a16="http://schemas.microsoft.com/office/drawing/2014/main" id="{B2FA6917-7E54-42C3-8983-50488156A3D3}"/>
+                <a16:creationId xmlns:a16="http://schemas.microsoft.com/office/drawing/2014/main" id="{38C551A0-30C2-4027-9421-625B3DD8266F}"/>
               </a:ext>
             </a:extLst>
           </p:cNvPr>
@@ -10996,7 +11004,7 @@
           <p:cNvPr id="2" name="">
             <a:extLst xmlns:a="http://schemas.openxmlformats.org/drawingml/2006/main">
               <a:ext uri="{FF2B5EF4-FFF2-40B4-BE49-F238E27FC236}">
-                <a16:creationId xmlns:a16="http://schemas.microsoft.com/office/drawing/2014/main" id="{3374D9B1-6E16-431E-954A-F5AB581A702B}"/>
+                <a16:creationId xmlns:a16="http://schemas.microsoft.com/office/drawing/2014/main" id="{48F2312E-D333-45E7-869C-A383DA00238C}"/>
               </a:ext>
             </a:extLst>
           </p:cNvPr>
@@ -11053,7 +11061,7 @@
           <p:cNvPr id="3" name="">
             <a:extLst xmlns:a="http://schemas.openxmlformats.org/drawingml/2006/main">
               <a:ext uri="{FF2B5EF4-FFF2-40B4-BE49-F238E27FC236}">
-                <a16:creationId xmlns:a16="http://schemas.microsoft.com/office/drawing/2014/main" id="{0259DCE5-880C-47D4-BAC0-CFF9ACF456B7}"/>
+                <a16:creationId xmlns:a16="http://schemas.microsoft.com/office/drawing/2014/main" id="{B8212956-0E09-4FDC-895E-1B0EF6A89341}"/>
               </a:ext>
             </a:extLst>
           </p:cNvPr>
@@ -11085,7 +11093,7 @@
           <p:cNvPr id="4" name="">
             <a:extLst xmlns:a="http://schemas.openxmlformats.org/drawingml/2006/main">
               <a:ext uri="{FF2B5EF4-FFF2-40B4-BE49-F238E27FC236}">
-                <a16:creationId xmlns:a16="http://schemas.microsoft.com/office/drawing/2014/main" id="{AD3A84E2-2CB7-4ABB-BF7A-9F90D4225400}"/>
+                <a16:creationId xmlns:a16="http://schemas.microsoft.com/office/drawing/2014/main" id="{91C6F291-2075-480F-B7A0-2F2A8C4DDC4E}"/>
               </a:ext>
             </a:extLst>
           </p:cNvPr>
@@ -11142,7 +11150,7 @@
           <p:cNvPr id="5" name="">
             <a:extLst xmlns:a="http://schemas.openxmlformats.org/drawingml/2006/main">
               <a:ext uri="{FF2B5EF4-FFF2-40B4-BE49-F238E27FC236}">
-                <a16:creationId xmlns:a16="http://schemas.microsoft.com/office/drawing/2014/main" id="{99102E26-EB84-4D53-9D1D-12D635277149}"/>
+                <a16:creationId xmlns:a16="http://schemas.microsoft.com/office/drawing/2014/main" id="{A110714F-C60E-48C3-A129-63F9CB4CEEE6}"/>
               </a:ext>
             </a:extLst>
           </p:cNvPr>
@@ -11199,7 +11207,7 @@
           <p:cNvPr id="6" name="">
             <a:extLst xmlns:a="http://schemas.openxmlformats.org/drawingml/2006/main">
               <a:ext uri="{FF2B5EF4-FFF2-40B4-BE49-F238E27FC236}">
-                <a16:creationId xmlns:a16="http://schemas.microsoft.com/office/drawing/2014/main" id="{A6FEF625-5203-4CAE-BE55-46F547689A12}"/>
+                <a16:creationId xmlns:a16="http://schemas.microsoft.com/office/drawing/2014/main" id="{980C9CEF-36AD-466D-BCCF-29A980F911F7}"/>
               </a:ext>
             </a:extLst>
           </p:cNvPr>
@@ -11256,7 +11264,7 @@
           <p:cNvPr id="7" name="">
             <a:extLst xmlns:a="http://schemas.openxmlformats.org/drawingml/2006/main">
               <a:ext uri="{FF2B5EF4-FFF2-40B4-BE49-F238E27FC236}">
-                <a16:creationId xmlns:a16="http://schemas.microsoft.com/office/drawing/2014/main" id="{BB4D0434-F463-4108-89F9-E924F2D53A9B}"/>
+                <a16:creationId xmlns:a16="http://schemas.microsoft.com/office/drawing/2014/main" id="{AD29B9A6-D8F1-4BB1-8950-796082366836}"/>
               </a:ext>
             </a:extLst>
           </p:cNvPr>
@@ -11288,7 +11296,7 @@
           <p:cNvPr id="8" name="">
             <a:extLst xmlns:a="http://schemas.openxmlformats.org/drawingml/2006/main">
               <a:ext uri="{FF2B5EF4-FFF2-40B4-BE49-F238E27FC236}">
-                <a16:creationId xmlns:a16="http://schemas.microsoft.com/office/drawing/2014/main" id="{5F16C465-D516-4CDA-88C6-C5F09BE56AA5}"/>
+                <a16:creationId xmlns:a16="http://schemas.microsoft.com/office/drawing/2014/main" id="{EE9EFBEB-B8E9-41D1-89F9-F5FA5C7DE0F6}"/>
               </a:ext>
             </a:extLst>
           </p:cNvPr>
@@ -11345,7 +11353,7 @@
           <p:cNvPr id="9" name="">
             <a:extLst xmlns:a="http://schemas.openxmlformats.org/drawingml/2006/main">
               <a:ext uri="{FF2B5EF4-FFF2-40B4-BE49-F238E27FC236}">
-                <a16:creationId xmlns:a16="http://schemas.microsoft.com/office/drawing/2014/main" id="{52E5C6F5-3FA1-403E-8DA6-AD37786297F2}"/>
+                <a16:creationId xmlns:a16="http://schemas.microsoft.com/office/drawing/2014/main" id="{6C09E5FB-653E-4C2C-BE2A-561A32068C0B}"/>
               </a:ext>
             </a:extLst>
           </p:cNvPr>
@@ -11406,7 +11414,7 @@
           <p:nvPr/>
         </p:nvPicPr>
         <p:blipFill>
-          <a:blip xmlns:r="http://schemas.openxmlformats.org/officeDocument/2006/relationships" xmlns:a="http://schemas.openxmlformats.org/drawingml/2006/main" r:embed="Rfcd51ac617084561"/>
+          <a:blip xmlns:r="http://schemas.openxmlformats.org/officeDocument/2006/relationships" xmlns:a="http://schemas.openxmlformats.org/drawingml/2006/main" r:embed="Rcea1c654902f43b5"/>
           <a:stretch xmlns:a="http://schemas.openxmlformats.org/drawingml/2006/main"/>
         </p:blipFill>
         <p:spPr>
@@ -11424,7 +11432,7 @@
           <p:cNvPr id="11" name="">
             <a:extLst xmlns:a="http://schemas.openxmlformats.org/drawingml/2006/main">
               <a:ext uri="{FF2B5EF4-FFF2-40B4-BE49-F238E27FC236}">
-                <a16:creationId xmlns:a16="http://schemas.microsoft.com/office/drawing/2014/main" id="{BF6AE65C-A5CF-4BEA-A487-7310DC253E44}"/>
+                <a16:creationId xmlns:a16="http://schemas.microsoft.com/office/drawing/2014/main" id="{FD8A7D19-621D-4A9E-ADDA-CC4512E26D14}"/>
               </a:ext>
             </a:extLst>
           </p:cNvPr>
@@ -11481,7 +11489,7 @@
           <p:cNvPr id="12" name="">
             <a:extLst xmlns:a="http://schemas.openxmlformats.org/drawingml/2006/main">
               <a:ext uri="{FF2B5EF4-FFF2-40B4-BE49-F238E27FC236}">
-                <a16:creationId xmlns:a16="http://schemas.microsoft.com/office/drawing/2014/main" id="{BD6BDB34-EA6F-49E0-BBB2-8961D74712F9}"/>
+                <a16:creationId xmlns:a16="http://schemas.microsoft.com/office/drawing/2014/main" id="{AE59D787-0D5A-4283-B0BF-3960B2BFFC76}"/>
               </a:ext>
             </a:extLst>
           </p:cNvPr>
@@ -11538,7 +11546,7 @@
           <p:cNvPr id="13" name="">
             <a:extLst xmlns:a="http://schemas.openxmlformats.org/drawingml/2006/main">
               <a:ext uri="{FF2B5EF4-FFF2-40B4-BE49-F238E27FC236}">
-                <a16:creationId xmlns:a16="http://schemas.microsoft.com/office/drawing/2014/main" id="{E2051299-8561-496C-AB2E-EE102F2324A7}"/>
+                <a16:creationId xmlns:a16="http://schemas.microsoft.com/office/drawing/2014/main" id="{48EC9EBB-09C2-417B-A27B-2A2E8042D496}"/>
               </a:ext>
             </a:extLst>
           </p:cNvPr>
@@ -11570,7 +11578,7 @@
           <p:cNvPr id="14" name="">
             <a:extLst xmlns:a="http://schemas.openxmlformats.org/drawingml/2006/main">
               <a:ext uri="{FF2B5EF4-FFF2-40B4-BE49-F238E27FC236}">
-                <a16:creationId xmlns:a16="http://schemas.microsoft.com/office/drawing/2014/main" id="{4AA7DDF6-59F0-4D03-8660-FCE0D99A4A32}"/>
+                <a16:creationId xmlns:a16="http://schemas.microsoft.com/office/drawing/2014/main" id="{269E2C5D-035D-4137-9EBA-EF9E8DF99A5D}"/>
               </a:ext>
             </a:extLst>
           </p:cNvPr>
@@ -11627,7 +11635,7 @@
           <p:cNvPr id="15" name="">
             <a:extLst xmlns:a="http://schemas.openxmlformats.org/drawingml/2006/main">
               <a:ext uri="{FF2B5EF4-FFF2-40B4-BE49-F238E27FC236}">
-                <a16:creationId xmlns:a16="http://schemas.microsoft.com/office/drawing/2014/main" id="{2FAD369C-B211-429B-A126-683D5737F847}"/>
+                <a16:creationId xmlns:a16="http://schemas.microsoft.com/office/drawing/2014/main" id="{DDDBBE49-76BB-4E52-8CAC-DD62C75D3603}"/>
               </a:ext>
             </a:extLst>
           </p:cNvPr>
@@ -11682,7 +11690,7 @@
     </p:spTree>
     <p:extLst>
       <p:ext uri="{BB962C8B-B14F-4D97-AF65-F5344CB8AC3E}">
-        <p14:creationId xmlns:p14="http://schemas.microsoft.com/office/powerpoint/2010/main" val="1835862107"/>
+        <p14:creationId xmlns:p14="http://schemas.microsoft.com/office/powerpoint/2010/main" val="1665071800"/>
       </p:ext>
     </p:extLst>
   </p:cSld>
@@ -11837,7 +11845,7 @@
           <p:cNvPr id="23" name="">
             <a:extLst xmlns:a="http://schemas.openxmlformats.org/drawingml/2006/main">
               <a:ext uri="{FF2B5EF4-FFF2-40B4-BE49-F238E27FC236}">
-                <a16:creationId xmlns:a16="http://schemas.microsoft.com/office/drawing/2014/main" id="{A5B2CD6E-CFB5-4853-B512-239E65401DCB}"/>
+                <a16:creationId xmlns:a16="http://schemas.microsoft.com/office/drawing/2014/main" id="{D32991BC-81A8-4E47-9E93-B9FD8A9C54EE}"/>
               </a:ext>
             </a:extLst>
           </p:cNvPr>
@@ -11869,7 +11877,7 @@
           <p:cNvPr id="2" name="">
             <a:extLst xmlns:a="http://schemas.openxmlformats.org/drawingml/2006/main">
               <a:ext uri="{FF2B5EF4-FFF2-40B4-BE49-F238E27FC236}">
-                <a16:creationId xmlns:a16="http://schemas.microsoft.com/office/drawing/2014/main" id="{FBE0A24E-6387-459C-BC22-DEEB8FFDA93F}"/>
+                <a16:creationId xmlns:a16="http://schemas.microsoft.com/office/drawing/2014/main" id="{9A9675F1-95D9-48D5-BFE6-3B8CEE96E604}"/>
               </a:ext>
             </a:extLst>
           </p:cNvPr>
@@ -11926,7 +11934,7 @@
           <p:cNvPr id="3" name="">
             <a:extLst xmlns:a="http://schemas.openxmlformats.org/drawingml/2006/main">
               <a:ext uri="{FF2B5EF4-FFF2-40B4-BE49-F238E27FC236}">
-                <a16:creationId xmlns:a16="http://schemas.microsoft.com/office/drawing/2014/main" id="{C0EA7A03-41F6-4242-8D61-33ADE884B893}"/>
+                <a16:creationId xmlns:a16="http://schemas.microsoft.com/office/drawing/2014/main" id="{04C00A45-37F1-4749-9D25-BD87F0BB4FD9}"/>
               </a:ext>
             </a:extLst>
           </p:cNvPr>
@@ -11958,7 +11966,7 @@
           <p:cNvPr id="4" name="">
             <a:extLst xmlns:a="http://schemas.openxmlformats.org/drawingml/2006/main">
               <a:ext uri="{FF2B5EF4-FFF2-40B4-BE49-F238E27FC236}">
-                <a16:creationId xmlns:a16="http://schemas.microsoft.com/office/drawing/2014/main" id="{0524837A-D129-416C-99DF-5A2551B9D63D}"/>
+                <a16:creationId xmlns:a16="http://schemas.microsoft.com/office/drawing/2014/main" id="{30662C6D-17FA-4BB7-8160-89F4CC16CDC2}"/>
               </a:ext>
             </a:extLst>
           </p:cNvPr>
@@ -12015,7 +12023,7 @@
           <p:cNvPr id="5" name="">
             <a:extLst xmlns:a="http://schemas.openxmlformats.org/drawingml/2006/main">
               <a:ext uri="{FF2B5EF4-FFF2-40B4-BE49-F238E27FC236}">
-                <a16:creationId xmlns:a16="http://schemas.microsoft.com/office/drawing/2014/main" id="{3A41AE5A-2DF7-42FB-BC19-178C4B09A968}"/>
+                <a16:creationId xmlns:a16="http://schemas.microsoft.com/office/drawing/2014/main" id="{3C352BE1-183A-4C24-B17A-6DF01FCF916A}"/>
               </a:ext>
             </a:extLst>
           </p:cNvPr>
@@ -12072,7 +12080,7 @@
           <p:cNvPr id="6" name="">
             <a:extLst xmlns:a="http://schemas.openxmlformats.org/drawingml/2006/main">
               <a:ext uri="{FF2B5EF4-FFF2-40B4-BE49-F238E27FC236}">
-                <a16:creationId xmlns:a16="http://schemas.microsoft.com/office/drawing/2014/main" id="{E51E97CA-BFEC-4F2B-A9A8-1F145D42C0FF}"/>
+                <a16:creationId xmlns:a16="http://schemas.microsoft.com/office/drawing/2014/main" id="{768D0122-450E-4926-8FE0-7183048060E1}"/>
               </a:ext>
             </a:extLst>
           </p:cNvPr>
@@ -12129,7 +12137,7 @@
           <p:cNvPr id="7" name="">
             <a:extLst xmlns:a="http://schemas.openxmlformats.org/drawingml/2006/main">
               <a:ext uri="{FF2B5EF4-FFF2-40B4-BE49-F238E27FC236}">
-                <a16:creationId xmlns:a16="http://schemas.microsoft.com/office/drawing/2014/main" id="{464929D7-BADA-4653-B58E-5289AD6F8F9A}"/>
+                <a16:creationId xmlns:a16="http://schemas.microsoft.com/office/drawing/2014/main" id="{C581CCC0-921D-4007-9B93-21731D34B8B6}"/>
               </a:ext>
             </a:extLst>
           </p:cNvPr>
@@ -12161,7 +12169,7 @@
           <p:cNvPr id="8" name="">
             <a:extLst xmlns:a="http://schemas.openxmlformats.org/drawingml/2006/main">
               <a:ext uri="{FF2B5EF4-FFF2-40B4-BE49-F238E27FC236}">
-                <a16:creationId xmlns:a16="http://schemas.microsoft.com/office/drawing/2014/main" id="{77D907DB-1FFA-489A-A088-6CAA1516659D}"/>
+                <a16:creationId xmlns:a16="http://schemas.microsoft.com/office/drawing/2014/main" id="{0C1020FF-1F3B-474D-B637-65D3DEF3FA4B}"/>
               </a:ext>
             </a:extLst>
           </p:cNvPr>
@@ -12218,7 +12226,7 @@
           <p:cNvPr id="9" name="">
             <a:extLst xmlns:a="http://schemas.openxmlformats.org/drawingml/2006/main">
               <a:ext uri="{FF2B5EF4-FFF2-40B4-BE49-F238E27FC236}">
-                <a16:creationId xmlns:a16="http://schemas.microsoft.com/office/drawing/2014/main" id="{52C4BC20-D228-482C-B63F-AC8A9E85EBD6}"/>
+                <a16:creationId xmlns:a16="http://schemas.microsoft.com/office/drawing/2014/main" id="{FA0B12F8-31E5-4DC7-86E2-745674E00136}"/>
               </a:ext>
             </a:extLst>
           </p:cNvPr>
@@ -12275,7 +12283,7 @@
           <p:cNvPr id="10" name="">
             <a:extLst xmlns:a="http://schemas.openxmlformats.org/drawingml/2006/main">
               <a:ext uri="{FF2B5EF4-FFF2-40B4-BE49-F238E27FC236}">
-                <a16:creationId xmlns:a16="http://schemas.microsoft.com/office/drawing/2014/main" id="{53B017EA-80B9-44DF-811A-12BFA72CD3F1}"/>
+                <a16:creationId xmlns:a16="http://schemas.microsoft.com/office/drawing/2014/main" id="{9E0EF927-B985-4EEC-928D-6E5F59C59845}"/>
               </a:ext>
             </a:extLst>
           </p:cNvPr>
@@ -12309,7 +12317,7 @@
           <p:cNvPr id="11" name="">
             <a:extLst xmlns:a="http://schemas.openxmlformats.org/drawingml/2006/main">
               <a:ext uri="{FF2B5EF4-FFF2-40B4-BE49-F238E27FC236}">
-                <a16:creationId xmlns:a16="http://schemas.microsoft.com/office/drawing/2014/main" id="{332F2C52-62D1-4157-8EB9-0E9F76CAC63A}"/>
+                <a16:creationId xmlns:a16="http://schemas.microsoft.com/office/drawing/2014/main" id="{B878917C-0BEF-43DA-B87A-75E5D11F0604}"/>
               </a:ext>
             </a:extLst>
           </p:cNvPr>
@@ -12341,7 +12349,7 @@
           <p:cNvPr id="12" name="">
             <a:extLst xmlns:a="http://schemas.openxmlformats.org/drawingml/2006/main">
               <a:ext uri="{FF2B5EF4-FFF2-40B4-BE49-F238E27FC236}">
-                <a16:creationId xmlns:a16="http://schemas.microsoft.com/office/drawing/2014/main" id="{33F23F37-23A7-45AC-BBAB-B6F695E30E80}"/>
+                <a16:creationId xmlns:a16="http://schemas.microsoft.com/office/drawing/2014/main" id="{7FE4AB7B-A55D-4AA3-8F5A-8C6A927C23AC}"/>
               </a:ext>
             </a:extLst>
           </p:cNvPr>
@@ -12398,7 +12406,7 @@
           <p:cNvPr id="13" name="">
             <a:extLst xmlns:a="http://schemas.openxmlformats.org/drawingml/2006/main">
               <a:ext uri="{FF2B5EF4-FFF2-40B4-BE49-F238E27FC236}">
-                <a16:creationId xmlns:a16="http://schemas.microsoft.com/office/drawing/2014/main" id="{38843C57-4D39-45DC-B34C-C06606132D70}"/>
+                <a16:creationId xmlns:a16="http://schemas.microsoft.com/office/drawing/2014/main" id="{F98DB61C-5433-4C48-A1D0-1EBA432905FB}"/>
               </a:ext>
             </a:extLst>
           </p:cNvPr>
@@ -12455,7 +12463,7 @@
           <p:cNvPr id="14" name="">
             <a:extLst xmlns:a="http://schemas.openxmlformats.org/drawingml/2006/main">
               <a:ext uri="{FF2B5EF4-FFF2-40B4-BE49-F238E27FC236}">
-                <a16:creationId xmlns:a16="http://schemas.microsoft.com/office/drawing/2014/main" id="{51D33455-0D9A-4B16-B95D-D2BF884ED88F}"/>
+                <a16:creationId xmlns:a16="http://schemas.microsoft.com/office/drawing/2014/main" id="{3D63E23A-5DD0-4F4E-94EB-6C338F86F33A}"/>
               </a:ext>
             </a:extLst>
           </p:cNvPr>
@@ -12489,7 +12497,7 @@
           <p:cNvPr id="15" name="">
             <a:extLst xmlns:a="http://schemas.openxmlformats.org/drawingml/2006/main">
               <a:ext uri="{FF2B5EF4-FFF2-40B4-BE49-F238E27FC236}">
-                <a16:creationId xmlns:a16="http://schemas.microsoft.com/office/drawing/2014/main" id="{ED686D41-D83C-4B57-804D-DD518F2AE0C4}"/>
+                <a16:creationId xmlns:a16="http://schemas.microsoft.com/office/drawing/2014/main" id="{8FF3CD11-C411-484A-A23B-B8070388BAE8}"/>
               </a:ext>
             </a:extLst>
           </p:cNvPr>
@@ -12521,7 +12529,7 @@
           <p:cNvPr id="16" name="">
             <a:extLst xmlns:a="http://schemas.openxmlformats.org/drawingml/2006/main">
               <a:ext uri="{FF2B5EF4-FFF2-40B4-BE49-F238E27FC236}">
-                <a16:creationId xmlns:a16="http://schemas.microsoft.com/office/drawing/2014/main" id="{55435580-1FE7-412B-8379-B76473249DA6}"/>
+                <a16:creationId xmlns:a16="http://schemas.microsoft.com/office/drawing/2014/main" id="{75451369-08BA-48FA-8467-9973393F9628}"/>
               </a:ext>
             </a:extLst>
           </p:cNvPr>
@@ -12578,7 +12586,7 @@
           <p:cNvPr id="17" name="">
             <a:extLst xmlns:a="http://schemas.openxmlformats.org/drawingml/2006/main">
               <a:ext uri="{FF2B5EF4-FFF2-40B4-BE49-F238E27FC236}">
-                <a16:creationId xmlns:a16="http://schemas.microsoft.com/office/drawing/2014/main" id="{C89A3A58-ADB4-4369-A0C3-000E0E2584F5}"/>
+                <a16:creationId xmlns:a16="http://schemas.microsoft.com/office/drawing/2014/main" id="{8785073E-0D16-43B4-81B0-519EC4D318C4}"/>
               </a:ext>
             </a:extLst>
           </p:cNvPr>
@@ -12635,7 +12643,7 @@
           <p:cNvPr id="18" name="">
             <a:extLst xmlns:a="http://schemas.openxmlformats.org/drawingml/2006/main">
               <a:ext uri="{FF2B5EF4-FFF2-40B4-BE49-F238E27FC236}">
-                <a16:creationId xmlns:a16="http://schemas.microsoft.com/office/drawing/2014/main" id="{34A35116-6274-4349-9E60-FBB5653B8A44}"/>
+                <a16:creationId xmlns:a16="http://schemas.microsoft.com/office/drawing/2014/main" id="{8FE0588F-EB16-43BF-968C-E9B1D9EDE924}"/>
               </a:ext>
             </a:extLst>
           </p:cNvPr>
@@ -12669,7 +12677,7 @@
           <p:cNvPr id="19" name="">
             <a:extLst xmlns:a="http://schemas.openxmlformats.org/drawingml/2006/main">
               <a:ext uri="{FF2B5EF4-FFF2-40B4-BE49-F238E27FC236}">
-                <a16:creationId xmlns:a16="http://schemas.microsoft.com/office/drawing/2014/main" id="{E0448144-D48A-4511-9EC7-6567D62DDCF5}"/>
+                <a16:creationId xmlns:a16="http://schemas.microsoft.com/office/drawing/2014/main" id="{87734F2C-3A78-4A06-91C5-C7080766595E}"/>
               </a:ext>
             </a:extLst>
           </p:cNvPr>
@@ -12701,7 +12709,7 @@
           <p:cNvPr id="20" name="">
             <a:extLst xmlns:a="http://schemas.openxmlformats.org/drawingml/2006/main">
               <a:ext uri="{FF2B5EF4-FFF2-40B4-BE49-F238E27FC236}">
-                <a16:creationId xmlns:a16="http://schemas.microsoft.com/office/drawing/2014/main" id="{AF7C0675-A21A-469E-A795-EA006A5C8CA6}"/>
+                <a16:creationId xmlns:a16="http://schemas.microsoft.com/office/drawing/2014/main" id="{580E7C38-B55E-4D1F-8F1A-FE1F1A1619C8}"/>
               </a:ext>
             </a:extLst>
           </p:cNvPr>
@@ -12758,7 +12766,7 @@
           <p:cNvPr id="21" name="">
             <a:extLst xmlns:a="http://schemas.openxmlformats.org/drawingml/2006/main">
               <a:ext uri="{FF2B5EF4-FFF2-40B4-BE49-F238E27FC236}">
-                <a16:creationId xmlns:a16="http://schemas.microsoft.com/office/drawing/2014/main" id="{09FFE147-11CD-458B-B9F3-121767218F40}"/>
+                <a16:creationId xmlns:a16="http://schemas.microsoft.com/office/drawing/2014/main" id="{99B4464E-7937-4C91-86B1-10D6121D1927}"/>
               </a:ext>
             </a:extLst>
           </p:cNvPr>
@@ -12815,7 +12823,7 @@
           <p:cNvPr id="22" name="">
             <a:extLst xmlns:a="http://schemas.openxmlformats.org/drawingml/2006/main">
               <a:ext uri="{FF2B5EF4-FFF2-40B4-BE49-F238E27FC236}">
-                <a16:creationId xmlns:a16="http://schemas.microsoft.com/office/drawing/2014/main" id="{8E2E7C22-03DC-48D0-A3DB-D12FBF447BA5}"/>
+                <a16:creationId xmlns:a16="http://schemas.microsoft.com/office/drawing/2014/main" id="{780AB871-D937-4522-8283-9EF6845D5C00}"/>
               </a:ext>
             </a:extLst>
           </p:cNvPr>
@@ -12870,7 +12878,7 @@
     </p:spTree>
     <p:extLst>
       <p:ext uri="{BB962C8B-B14F-4D97-AF65-F5344CB8AC3E}">
-        <p14:creationId xmlns:p14="http://schemas.microsoft.com/office/powerpoint/2010/main" val="743065830"/>
+        <p14:creationId xmlns:p14="http://schemas.microsoft.com/office/powerpoint/2010/main" val="1281863802"/>
       </p:ext>
     </p:extLst>
   </p:cSld>
@@ -13071,7 +13079,7 @@
           <p:cNvPr id="22" name="">
             <a:extLst xmlns:a="http://schemas.openxmlformats.org/drawingml/2006/main">
               <a:ext uri="{FF2B5EF4-FFF2-40B4-BE49-F238E27FC236}">
-                <a16:creationId xmlns:a16="http://schemas.microsoft.com/office/drawing/2014/main" id="{648FBB44-C262-4DAB-AC89-259166D7E692}"/>
+                <a16:creationId xmlns:a16="http://schemas.microsoft.com/office/drawing/2014/main" id="{A3DE610D-84C6-454B-B1AF-F607259EC73D}"/>
               </a:ext>
             </a:extLst>
           </p:cNvPr>
@@ -13103,7 +13111,7 @@
           <p:cNvPr id="2" name="">
             <a:extLst xmlns:a="http://schemas.openxmlformats.org/drawingml/2006/main">
               <a:ext uri="{FF2B5EF4-FFF2-40B4-BE49-F238E27FC236}">
-                <a16:creationId xmlns:a16="http://schemas.microsoft.com/office/drawing/2014/main" id="{482F5B4D-84C8-48EF-88F7-4669B185C663}"/>
+                <a16:creationId xmlns:a16="http://schemas.microsoft.com/office/drawing/2014/main" id="{14FE5378-0830-4CEC-B1B0-16C8F69C3F70}"/>
               </a:ext>
             </a:extLst>
           </p:cNvPr>
@@ -13160,7 +13168,7 @@
           <p:cNvPr id="3" name="">
             <a:extLst xmlns:a="http://schemas.openxmlformats.org/drawingml/2006/main">
               <a:ext uri="{FF2B5EF4-FFF2-40B4-BE49-F238E27FC236}">
-                <a16:creationId xmlns:a16="http://schemas.microsoft.com/office/drawing/2014/main" id="{7307DDF7-2FCD-42A4-A629-73FF94C72227}"/>
+                <a16:creationId xmlns:a16="http://schemas.microsoft.com/office/drawing/2014/main" id="{445A146B-9430-4F2E-9FC1-C7D0406E6400}"/>
               </a:ext>
             </a:extLst>
           </p:cNvPr>
@@ -13192,7 +13200,7 @@
           <p:cNvPr id="4" name="">
             <a:extLst xmlns:a="http://schemas.openxmlformats.org/drawingml/2006/main">
               <a:ext uri="{FF2B5EF4-FFF2-40B4-BE49-F238E27FC236}">
-                <a16:creationId xmlns:a16="http://schemas.microsoft.com/office/drawing/2014/main" id="{F5E8850F-9F2D-4030-9112-841633D558E6}"/>
+                <a16:creationId xmlns:a16="http://schemas.microsoft.com/office/drawing/2014/main" id="{B2CF832B-3A04-43F2-A5E8-FD6FEFFBE9E3}"/>
               </a:ext>
             </a:extLst>
           </p:cNvPr>
@@ -13249,7 +13257,7 @@
           <p:cNvPr id="5" name="">
             <a:extLst xmlns:a="http://schemas.openxmlformats.org/drawingml/2006/main">
               <a:ext uri="{FF2B5EF4-FFF2-40B4-BE49-F238E27FC236}">
-                <a16:creationId xmlns:a16="http://schemas.microsoft.com/office/drawing/2014/main" id="{CD7FC215-DFDE-4E63-8F52-FFE78F42356D}"/>
+                <a16:creationId xmlns:a16="http://schemas.microsoft.com/office/drawing/2014/main" id="{90EA0677-1341-4BC3-85B1-BF737B07897F}"/>
               </a:ext>
             </a:extLst>
           </p:cNvPr>
@@ -13306,7 +13314,7 @@
           <p:cNvPr id="6" name="">
             <a:extLst xmlns:a="http://schemas.openxmlformats.org/drawingml/2006/main">
               <a:ext uri="{FF2B5EF4-FFF2-40B4-BE49-F238E27FC236}">
-                <a16:creationId xmlns:a16="http://schemas.microsoft.com/office/drawing/2014/main" id="{FE6FE0E2-5F1B-4B6E-BE9A-7A8857158633}"/>
+                <a16:creationId xmlns:a16="http://schemas.microsoft.com/office/drawing/2014/main" id="{D51EEE7C-C0F0-4C4A-BC9C-0578AFB9A499}"/>
               </a:ext>
             </a:extLst>
           </p:cNvPr>
@@ -13363,7 +13371,7 @@
           <p:cNvPr id="7" name="">
             <a:extLst xmlns:a="http://schemas.openxmlformats.org/drawingml/2006/main">
               <a:ext uri="{FF2B5EF4-FFF2-40B4-BE49-F238E27FC236}">
-                <a16:creationId xmlns:a16="http://schemas.microsoft.com/office/drawing/2014/main" id="{96114F56-9620-4FB7-A689-0212D95C79E6}"/>
+                <a16:creationId xmlns:a16="http://schemas.microsoft.com/office/drawing/2014/main" id="{4774A93F-A1E8-48C4-8CDB-5DF4FD75AFE2}"/>
               </a:ext>
             </a:extLst>
           </p:cNvPr>
@@ -13395,7 +13403,7 @@
           <p:cNvPr id="8" name="">
             <a:extLst xmlns:a="http://schemas.openxmlformats.org/drawingml/2006/main">
               <a:ext uri="{FF2B5EF4-FFF2-40B4-BE49-F238E27FC236}">
-                <a16:creationId xmlns:a16="http://schemas.microsoft.com/office/drawing/2014/main" id="{97EA8EAF-FB19-4D22-84A4-5A056E5BC64F}"/>
+                <a16:creationId xmlns:a16="http://schemas.microsoft.com/office/drawing/2014/main" id="{E0B2836A-A15E-4013-A8C9-4FAB02D5C610}"/>
               </a:ext>
             </a:extLst>
           </p:cNvPr>
@@ -13452,7 +13460,7 @@
           <p:cNvPr id="9" name="">
             <a:extLst xmlns:a="http://schemas.openxmlformats.org/drawingml/2006/main">
               <a:ext uri="{FF2B5EF4-FFF2-40B4-BE49-F238E27FC236}">
-                <a16:creationId xmlns:a16="http://schemas.microsoft.com/office/drawing/2014/main" id="{386C5F8D-3103-45D0-A61F-4DA190B65EAF}"/>
+                <a16:creationId xmlns:a16="http://schemas.microsoft.com/office/drawing/2014/main" id="{ACF77D2A-4223-45EE-A6AF-319542E42ECD}"/>
               </a:ext>
             </a:extLst>
           </p:cNvPr>
@@ -13509,7 +13517,7 @@
           <p:cNvPr id="10" name="">
             <a:extLst xmlns:a="http://schemas.openxmlformats.org/drawingml/2006/main">
               <a:ext uri="{FF2B5EF4-FFF2-40B4-BE49-F238E27FC236}">
-                <a16:creationId xmlns:a16="http://schemas.microsoft.com/office/drawing/2014/main" id="{76044805-7FA0-41B1-856E-6A33D2F7D8F3}"/>
+                <a16:creationId xmlns:a16="http://schemas.microsoft.com/office/drawing/2014/main" id="{61C9A6BE-3B50-4269-AD13-82C21855A67B}"/>
               </a:ext>
             </a:extLst>
           </p:cNvPr>
@@ -13543,7 +13551,7 @@
           <p:cNvPr id="11" name="">
             <a:extLst xmlns:a="http://schemas.openxmlformats.org/drawingml/2006/main">
               <a:ext uri="{FF2B5EF4-FFF2-40B4-BE49-F238E27FC236}">
-                <a16:creationId xmlns:a16="http://schemas.microsoft.com/office/drawing/2014/main" id="{096F08B9-8938-4086-9D71-3DC8E0132BB6}"/>
+                <a16:creationId xmlns:a16="http://schemas.microsoft.com/office/drawing/2014/main" id="{15A9F0AC-7E2F-423F-AEEC-41829182601F}"/>
               </a:ext>
             </a:extLst>
           </p:cNvPr>
@@ -13575,7 +13583,7 @@
           <p:cNvPr id="12" name="">
             <a:extLst xmlns:a="http://schemas.openxmlformats.org/drawingml/2006/main">
               <a:ext uri="{FF2B5EF4-FFF2-40B4-BE49-F238E27FC236}">
-                <a16:creationId xmlns:a16="http://schemas.microsoft.com/office/drawing/2014/main" id="{4A228C05-D0B2-4F7F-9A32-2E98D26C17F9}"/>
+                <a16:creationId xmlns:a16="http://schemas.microsoft.com/office/drawing/2014/main" id="{93558F89-01F5-4312-8977-8FB963FA2363}"/>
               </a:ext>
             </a:extLst>
           </p:cNvPr>
@@ -13632,7 +13640,7 @@
           <p:cNvPr id="13" name="">
             <a:extLst xmlns:a="http://schemas.openxmlformats.org/drawingml/2006/main">
               <a:ext uri="{FF2B5EF4-FFF2-40B4-BE49-F238E27FC236}">
-                <a16:creationId xmlns:a16="http://schemas.microsoft.com/office/drawing/2014/main" id="{A4F9F7B1-FA20-4069-BE7B-3861CE3C12E2}"/>
+                <a16:creationId xmlns:a16="http://schemas.microsoft.com/office/drawing/2014/main" id="{B92BDB49-92A4-484E-A982-5493E3880966}"/>
               </a:ext>
             </a:extLst>
           </p:cNvPr>
@@ -13689,7 +13697,7 @@
           <p:cNvPr id="14" name="">
             <a:extLst xmlns:a="http://schemas.openxmlformats.org/drawingml/2006/main">
               <a:ext uri="{FF2B5EF4-FFF2-40B4-BE49-F238E27FC236}">
-                <a16:creationId xmlns:a16="http://schemas.microsoft.com/office/drawing/2014/main" id="{27B8B80F-2177-44E2-861C-20522616BE48}"/>
+                <a16:creationId xmlns:a16="http://schemas.microsoft.com/office/drawing/2014/main" id="{F9D8A1CF-11E3-4EE5-B11B-EFB0ED27F4BD}"/>
               </a:ext>
             </a:extLst>
           </p:cNvPr>
@@ -13723,7 +13731,7 @@
           <p:cNvPr id="15" name="">
             <a:extLst xmlns:a="http://schemas.openxmlformats.org/drawingml/2006/main">
               <a:ext uri="{FF2B5EF4-FFF2-40B4-BE49-F238E27FC236}">
-                <a16:creationId xmlns:a16="http://schemas.microsoft.com/office/drawing/2014/main" id="{44CD67A5-8713-4B4B-90CC-4398463AB0F8}"/>
+                <a16:creationId xmlns:a16="http://schemas.microsoft.com/office/drawing/2014/main" id="{79EB7BBF-33EB-4594-B22B-F7FDBE084038}"/>
               </a:ext>
             </a:extLst>
           </p:cNvPr>
@@ -13755,7 +13763,7 @@
           <p:cNvPr id="16" name="">
             <a:extLst xmlns:a="http://schemas.openxmlformats.org/drawingml/2006/main">
               <a:ext uri="{FF2B5EF4-FFF2-40B4-BE49-F238E27FC236}">
-                <a16:creationId xmlns:a16="http://schemas.microsoft.com/office/drawing/2014/main" id="{9B0D6581-2166-4946-9FA5-33F5CD5C5F56}"/>
+                <a16:creationId xmlns:a16="http://schemas.microsoft.com/office/drawing/2014/main" id="{BBE86791-8F38-4EA4-9BBD-3A2C392D4FE1}"/>
               </a:ext>
             </a:extLst>
           </p:cNvPr>
@@ -13812,7 +13820,7 @@
           <p:cNvPr id="17" name="">
             <a:extLst xmlns:a="http://schemas.openxmlformats.org/drawingml/2006/main">
               <a:ext uri="{FF2B5EF4-FFF2-40B4-BE49-F238E27FC236}">
-                <a16:creationId xmlns:a16="http://schemas.microsoft.com/office/drawing/2014/main" id="{2D625B5A-24DE-48C0-95E2-04CC9BAC96F9}"/>
+                <a16:creationId xmlns:a16="http://schemas.microsoft.com/office/drawing/2014/main" id="{D658EC77-E52E-4167-9C8E-00AFD6B19F6E}"/>
               </a:ext>
             </a:extLst>
           </p:cNvPr>
@@ -13869,7 +13877,7 @@
           <p:cNvPr id="18" name="">
             <a:extLst xmlns:a="http://schemas.openxmlformats.org/drawingml/2006/main">
               <a:ext uri="{FF2B5EF4-FFF2-40B4-BE49-F238E27FC236}">
-                <a16:creationId xmlns:a16="http://schemas.microsoft.com/office/drawing/2014/main" id="{29336E6E-85C8-4B83-8D34-7BDBDEFE1293}"/>
+                <a16:creationId xmlns:a16="http://schemas.microsoft.com/office/drawing/2014/main" id="{A3512899-85E0-4355-ACDC-C664B45C5A37}"/>
               </a:ext>
             </a:extLst>
           </p:cNvPr>
@@ -13903,7 +13911,7 @@
           <p:cNvPr id="19" name="">
             <a:extLst xmlns:a="http://schemas.openxmlformats.org/drawingml/2006/main">
               <a:ext uri="{FF2B5EF4-FFF2-40B4-BE49-F238E27FC236}">
-                <a16:creationId xmlns:a16="http://schemas.microsoft.com/office/drawing/2014/main" id="{ED77ED69-3A3D-477D-8EDC-0314AAD5A8EE}"/>
+                <a16:creationId xmlns:a16="http://schemas.microsoft.com/office/drawing/2014/main" id="{9152C6BC-0892-47BF-80A9-5487EE10F3C5}"/>
               </a:ext>
             </a:extLst>
           </p:cNvPr>
@@ -13935,7 +13943,7 @@
           <p:cNvPr id="20" name="">
             <a:extLst xmlns:a="http://schemas.openxmlformats.org/drawingml/2006/main">
               <a:ext uri="{FF2B5EF4-FFF2-40B4-BE49-F238E27FC236}">
-                <a16:creationId xmlns:a16="http://schemas.microsoft.com/office/drawing/2014/main" id="{F6C4D7FE-D53A-4BAB-835E-4E69DF60BEEE}"/>
+                <a16:creationId xmlns:a16="http://schemas.microsoft.com/office/drawing/2014/main" id="{9E62E090-6DB9-41CB-A156-27A2BDD5DFF0}"/>
               </a:ext>
             </a:extLst>
           </p:cNvPr>
@@ -13992,7 +14000,7 @@
           <p:cNvPr id="21" name="">
             <a:extLst xmlns:a="http://schemas.openxmlformats.org/drawingml/2006/main">
               <a:ext uri="{FF2B5EF4-FFF2-40B4-BE49-F238E27FC236}">
-                <a16:creationId xmlns:a16="http://schemas.microsoft.com/office/drawing/2014/main" id="{FB392645-321F-4B1E-82C0-F18867709890}"/>
+                <a16:creationId xmlns:a16="http://schemas.microsoft.com/office/drawing/2014/main" id="{0B21B425-4C65-425D-B2B7-F82EE6BA9B55}"/>
               </a:ext>
             </a:extLst>
           </p:cNvPr>
@@ -14047,7 +14055,7 @@
     </p:spTree>
     <p:extLst>
       <p:ext uri="{BB962C8B-B14F-4D97-AF65-F5344CB8AC3E}">
-        <p14:creationId xmlns:p14="http://schemas.microsoft.com/office/powerpoint/2010/main" val="1529861683"/>
+        <p14:creationId xmlns:p14="http://schemas.microsoft.com/office/powerpoint/2010/main" val="438896746"/>
       </p:ext>
     </p:extLst>
   </p:cSld>
